--- a/ゲーム科2年/00_前期/ゲーム開発Ⅰ/ゲーム物理学/座学/21_運動エネルギー.pptx
+++ b/ゲーム科2年/00_前期/ゲーム開発Ⅰ/ゲーム物理学/座学/21_運動エネルギー.pptx
@@ -8,6 +8,9 @@
     <p:sldId id="261" r:id="rId2"/>
     <p:sldId id="262" r:id="rId3"/>
     <p:sldId id="263" r:id="rId4"/>
+    <p:sldId id="265" r:id="rId5"/>
+    <p:sldId id="264" r:id="rId6"/>
+    <p:sldId id="266" r:id="rId7"/>
   </p:sldIdLst>
   <p:sldSz cx="12192000" cy="6858000"/>
   <p:notesSz cx="6858000" cy="9144000"/>
@@ -261,7 +264,7 @@
           <a:p>
             <a:fld id="{E9CC885B-4903-4D54-9A93-00025F12DED9}" type="datetimeFigureOut">
               <a:rPr kumimoji="1" lang="ja-JP" altLang="en-US" smtClean="0"/>
-              <a:t>2025/10/1</a:t>
+              <a:t>2025/10/2</a:t>
             </a:fld>
             <a:endParaRPr kumimoji="1" lang="ja-JP" altLang="en-US"/>
           </a:p>
@@ -491,7 +494,7 @@
           <a:p>
             <a:fld id="{E9CC885B-4903-4D54-9A93-00025F12DED9}" type="datetimeFigureOut">
               <a:rPr kumimoji="1" lang="ja-JP" altLang="en-US" smtClean="0"/>
-              <a:t>2025/10/1</a:t>
+              <a:t>2025/10/2</a:t>
             </a:fld>
             <a:endParaRPr kumimoji="1" lang="ja-JP" altLang="en-US"/>
           </a:p>
@@ -731,7 +734,7 @@
           <a:p>
             <a:fld id="{E9CC885B-4903-4D54-9A93-00025F12DED9}" type="datetimeFigureOut">
               <a:rPr kumimoji="1" lang="ja-JP" altLang="en-US" smtClean="0"/>
-              <a:t>2025/10/1</a:t>
+              <a:t>2025/10/2</a:t>
             </a:fld>
             <a:endParaRPr kumimoji="1" lang="ja-JP" altLang="en-US"/>
           </a:p>
@@ -961,7 +964,7 @@
           <a:p>
             <a:fld id="{E9CC885B-4903-4D54-9A93-00025F12DED9}" type="datetimeFigureOut">
               <a:rPr kumimoji="1" lang="ja-JP" altLang="en-US" smtClean="0"/>
-              <a:t>2025/10/1</a:t>
+              <a:t>2025/10/2</a:t>
             </a:fld>
             <a:endParaRPr kumimoji="1" lang="ja-JP" altLang="en-US"/>
           </a:p>
@@ -1236,7 +1239,7 @@
           <a:p>
             <a:fld id="{E9CC885B-4903-4D54-9A93-00025F12DED9}" type="datetimeFigureOut">
               <a:rPr kumimoji="1" lang="ja-JP" altLang="en-US" smtClean="0"/>
-              <a:t>2025/10/1</a:t>
+              <a:t>2025/10/2</a:t>
             </a:fld>
             <a:endParaRPr kumimoji="1" lang="ja-JP" altLang="en-US"/>
           </a:p>
@@ -1565,7 +1568,7 @@
           <a:p>
             <a:fld id="{E9CC885B-4903-4D54-9A93-00025F12DED9}" type="datetimeFigureOut">
               <a:rPr kumimoji="1" lang="ja-JP" altLang="en-US" smtClean="0"/>
-              <a:t>2025/10/1</a:t>
+              <a:t>2025/10/2</a:t>
             </a:fld>
             <a:endParaRPr kumimoji="1" lang="ja-JP" altLang="en-US"/>
           </a:p>
@@ -2041,7 +2044,7 @@
           <a:p>
             <a:fld id="{E9CC885B-4903-4D54-9A93-00025F12DED9}" type="datetimeFigureOut">
               <a:rPr kumimoji="1" lang="ja-JP" altLang="en-US" smtClean="0"/>
-              <a:t>2025/10/1</a:t>
+              <a:t>2025/10/2</a:t>
             </a:fld>
             <a:endParaRPr kumimoji="1" lang="ja-JP" altLang="en-US"/>
           </a:p>
@@ -2182,7 +2185,7 @@
           <a:p>
             <a:fld id="{E9CC885B-4903-4D54-9A93-00025F12DED9}" type="datetimeFigureOut">
               <a:rPr kumimoji="1" lang="ja-JP" altLang="en-US" smtClean="0"/>
-              <a:t>2025/10/1</a:t>
+              <a:t>2025/10/2</a:t>
             </a:fld>
             <a:endParaRPr kumimoji="1" lang="ja-JP" altLang="en-US"/>
           </a:p>
@@ -2295,7 +2298,7 @@
           <a:p>
             <a:fld id="{E9CC885B-4903-4D54-9A93-00025F12DED9}" type="datetimeFigureOut">
               <a:rPr kumimoji="1" lang="ja-JP" altLang="en-US" smtClean="0"/>
-              <a:t>2025/10/1</a:t>
+              <a:t>2025/10/2</a:t>
             </a:fld>
             <a:endParaRPr kumimoji="1" lang="ja-JP" altLang="en-US"/>
           </a:p>
@@ -2638,7 +2641,7 @@
           <a:p>
             <a:fld id="{E9CC885B-4903-4D54-9A93-00025F12DED9}" type="datetimeFigureOut">
               <a:rPr kumimoji="1" lang="ja-JP" altLang="en-US" smtClean="0"/>
-              <a:t>2025/10/1</a:t>
+              <a:t>2025/10/2</a:t>
             </a:fld>
             <a:endParaRPr kumimoji="1" lang="ja-JP" altLang="en-US"/>
           </a:p>
@@ -2926,7 +2929,7 @@
           <a:p>
             <a:fld id="{E9CC885B-4903-4D54-9A93-00025F12DED9}" type="datetimeFigureOut">
               <a:rPr kumimoji="1" lang="ja-JP" altLang="en-US" smtClean="0"/>
-              <a:t>2025/10/1</a:t>
+              <a:t>2025/10/2</a:t>
             </a:fld>
             <a:endParaRPr kumimoji="1" lang="ja-JP" altLang="en-US"/>
           </a:p>
@@ -3199,7 +3202,7 @@
           <a:p>
             <a:fld id="{E9CC885B-4903-4D54-9A93-00025F12DED9}" type="datetimeFigureOut">
               <a:rPr kumimoji="1" lang="ja-JP" altLang="en-US" smtClean="0"/>
-              <a:t>2025/10/1</a:t>
+              <a:t>2025/10/2</a:t>
             </a:fld>
             <a:endParaRPr kumimoji="1" lang="ja-JP" altLang="en-US"/>
           </a:p>
@@ -3706,8 +3709,8 @@
           </a:p>
         </p:txBody>
       </p:sp>
-      <mc:AlternateContent xmlns:mc="http://schemas.openxmlformats.org/markup-compatibility/2006">
-        <mc:Choice xmlns:a14="http://schemas.microsoft.com/office/drawing/2010/main" Requires="a14">
+      <mc:AlternateContent xmlns:mc="http://schemas.openxmlformats.org/markup-compatibility/2006" xmlns:a14="http://schemas.microsoft.com/office/drawing/2010/main">
+        <mc:Choice Requires="a14">
           <p:sp>
             <p:nvSpPr>
               <p:cNvPr id="6" name="テキスト ボックス 5">
@@ -3973,7 +3976,7 @@
             </p:txBody>
           </p:sp>
         </mc:Choice>
-        <mc:Fallback>
+        <mc:Fallback xmlns="">
           <p:sp>
             <p:nvSpPr>
               <p:cNvPr id="6" name="テキスト ボックス 5">
@@ -4138,8 +4141,8 @@
           </a:p>
         </p:txBody>
       </p:sp>
-      <mc:AlternateContent xmlns:mc="http://schemas.openxmlformats.org/markup-compatibility/2006">
-        <mc:Choice xmlns:a14="http://schemas.microsoft.com/office/drawing/2010/main" Requires="a14">
+      <mc:AlternateContent xmlns:mc="http://schemas.openxmlformats.org/markup-compatibility/2006" xmlns:a14="http://schemas.microsoft.com/office/drawing/2010/main">
+        <mc:Choice Requires="a14">
           <p:sp>
             <p:nvSpPr>
               <p:cNvPr id="6" name="テキスト ボックス 5">
@@ -4696,7 +4699,7 @@
             </p:txBody>
           </p:sp>
         </mc:Choice>
-        <mc:Fallback>
+        <mc:Fallback xmlns="">
           <p:sp>
             <p:nvSpPr>
               <p:cNvPr id="6" name="テキスト ボックス 5">
@@ -4807,8 +4810,8 @@
           </a:p>
         </p:txBody>
       </p:sp>
-      <mc:AlternateContent xmlns:mc="http://schemas.openxmlformats.org/markup-compatibility/2006">
-        <mc:Choice xmlns:a14="http://schemas.microsoft.com/office/drawing/2010/main" Requires="a14">
+      <mc:AlternateContent xmlns:mc="http://schemas.openxmlformats.org/markup-compatibility/2006" xmlns:a14="http://schemas.microsoft.com/office/drawing/2010/main">
+        <mc:Choice Requires="a14">
           <p:sp>
             <p:nvSpPr>
               <p:cNvPr id="6" name="テキスト ボックス 5">
@@ -5467,7 +5470,7 @@
             </p:txBody>
           </p:sp>
         </mc:Choice>
-        <mc:Fallback>
+        <mc:Fallback xmlns="">
           <p:sp>
             <p:nvSpPr>
               <p:cNvPr id="6" name="テキスト ボックス 5">
@@ -5516,6 +5519,1960 @@
     <p:extLst>
       <p:ext uri="{BB962C8B-B14F-4D97-AF65-F5344CB8AC3E}">
         <p14:creationId xmlns:p14="http://schemas.microsoft.com/office/powerpoint/2010/main" val="3778037847"/>
+      </p:ext>
+    </p:extLst>
+  </p:cSld>
+  <p:clrMapOvr>
+    <a:masterClrMapping/>
+  </p:clrMapOvr>
+</p:sld>
+</file>
+
+<file path=ppt/slides/slide4.xml><?xml version="1.0" encoding="utf-8"?>
+<p:sld xmlns:a="http://schemas.openxmlformats.org/drawingml/2006/main" xmlns:r="http://schemas.openxmlformats.org/officeDocument/2006/relationships" xmlns:p="http://schemas.openxmlformats.org/presentationml/2006/main">
+  <p:cSld>
+    <p:spTree>
+      <p:nvGrpSpPr>
+        <p:cNvPr id="1" name=""/>
+        <p:cNvGrpSpPr/>
+        <p:nvPr/>
+      </p:nvGrpSpPr>
+      <p:grpSpPr>
+        <a:xfrm>
+          <a:off x="0" y="0"/>
+          <a:ext cx="0" cy="0"/>
+          <a:chOff x="0" y="0"/>
+          <a:chExt cx="0" cy="0"/>
+        </a:xfrm>
+      </p:grpSpPr>
+      <p:sp>
+        <p:nvSpPr>
+          <p:cNvPr id="2" name="四角形: 角を丸くする 1">
+            <a:extLst>
+              <a:ext uri="{FF2B5EF4-FFF2-40B4-BE49-F238E27FC236}">
+                <a16:creationId xmlns:a16="http://schemas.microsoft.com/office/drawing/2014/main" id="{ADE3CAC9-8C0A-4C66-BC24-1CAB9786DAA4}"/>
+              </a:ext>
+            </a:extLst>
+          </p:cNvPr>
+          <p:cNvSpPr/>
+          <p:nvPr/>
+        </p:nvSpPr>
+        <p:spPr>
+          <a:xfrm>
+            <a:off x="340659" y="1828800"/>
+            <a:ext cx="5549153" cy="4233489"/>
+          </a:xfrm>
+          <a:prstGeom prst="roundRect">
+            <a:avLst/>
+          </a:prstGeom>
+          <a:solidFill>
+            <a:schemeClr val="bg1">
+              <a:lumMod val="85000"/>
+            </a:schemeClr>
+          </a:solidFill>
+          <a:ln>
+            <a:noFill/>
+          </a:ln>
+        </p:spPr>
+        <p:style>
+          <a:lnRef idx="2">
+            <a:schemeClr val="accent1">
+              <a:shade val="50000"/>
+            </a:schemeClr>
+          </a:lnRef>
+          <a:fillRef idx="1">
+            <a:schemeClr val="accent1"/>
+          </a:fillRef>
+          <a:effectRef idx="0">
+            <a:schemeClr val="accent1"/>
+          </a:effectRef>
+          <a:fontRef idx="minor">
+            <a:schemeClr val="lt1"/>
+          </a:fontRef>
+        </p:style>
+        <p:txBody>
+          <a:bodyPr rtlCol="0" anchor="ctr"/>
+          <a:lstStyle/>
+          <a:p>
+            <a:pPr algn="ctr"/>
+            <a:endParaRPr kumimoji="1" lang="ja-JP" altLang="en-US"/>
+          </a:p>
+        </p:txBody>
+      </p:sp>
+      <p:sp>
+        <p:nvSpPr>
+          <p:cNvPr id="4" name="テキスト ボックス 3">
+            <a:extLst>
+              <a:ext uri="{FF2B5EF4-FFF2-40B4-BE49-F238E27FC236}">
+                <a16:creationId xmlns:a16="http://schemas.microsoft.com/office/drawing/2014/main" id="{5A13BF46-B8C5-48AA-8308-C9ECFF431A18}"/>
+              </a:ext>
+            </a:extLst>
+          </p:cNvPr>
+          <p:cNvSpPr txBox="1"/>
+          <p:nvPr/>
+        </p:nvSpPr>
+        <p:spPr>
+          <a:xfrm>
+            <a:off x="567542" y="491954"/>
+            <a:ext cx="3995004" cy="584775"/>
+          </a:xfrm>
+          <a:prstGeom prst="rect">
+            <a:avLst/>
+          </a:prstGeom>
+          <a:noFill/>
+        </p:spPr>
+        <p:txBody>
+          <a:bodyPr wrap="none" rtlCol="0">
+            <a:spAutoFit/>
+          </a:bodyPr>
+          <a:lstStyle/>
+          <a:p>
+            <a:r>
+              <a:rPr kumimoji="1" lang="ja-JP" altLang="en-US" sz="3200" b="1" u="sng" dirty="0"/>
+              <a:t>運動エネルギー 例題</a:t>
+            </a:r>
+            <a:endParaRPr kumimoji="1" lang="en-US" altLang="ja-JP" sz="3200" b="1" u="sng" dirty="0"/>
+          </a:p>
+        </p:txBody>
+      </p:sp>
+      <mc:AlternateContent xmlns:mc="http://schemas.openxmlformats.org/markup-compatibility/2006">
+        <mc:Choice xmlns:a14="http://schemas.microsoft.com/office/drawing/2010/main" Requires="a14">
+          <p:sp>
+            <p:nvSpPr>
+              <p:cNvPr id="6" name="テキスト ボックス 5">
+                <a:extLst>
+                  <a:ext uri="{FF2B5EF4-FFF2-40B4-BE49-F238E27FC236}">
+                    <a16:creationId xmlns:a16="http://schemas.microsoft.com/office/drawing/2014/main" id="{55830AD6-028B-4C4E-80BF-B70DFC1C3A46}"/>
+                  </a:ext>
+                </a:extLst>
+              </p:cNvPr>
+              <p:cNvSpPr txBox="1"/>
+              <p:nvPr/>
+            </p:nvSpPr>
+            <p:spPr>
+              <a:xfrm>
+                <a:off x="567542" y="1216429"/>
+                <a:ext cx="10033516" cy="5444824"/>
+              </a:xfrm>
+              <a:prstGeom prst="rect">
+                <a:avLst/>
+              </a:prstGeom>
+              <a:noFill/>
+            </p:spPr>
+            <p:txBody>
+              <a:bodyPr wrap="none" rtlCol="0">
+                <a:spAutoFit/>
+              </a:bodyPr>
+              <a:lstStyle/>
+              <a:p>
+                <a:r>
+                  <a:rPr lang="ja-JP" altLang="en-US" sz="2400" dirty="0"/>
+                  <a:t>前回学習した仕事と、今回の運動エネルギーを使った定理があります。</a:t>
+                </a:r>
+                <a:endParaRPr lang="en-US" altLang="ja-JP" sz="2400" dirty="0"/>
+              </a:p>
+              <a:p>
+                <a:endParaRPr lang="en-US" altLang="ja-JP" sz="2400" dirty="0"/>
+              </a:p>
+              <a:p>
+                <a:r>
+                  <a:rPr lang="ja-JP" altLang="en-US" sz="2400" b="1" dirty="0">
+                    <a:solidFill>
+                      <a:srgbClr val="FF0000"/>
+                    </a:solidFill>
+                  </a:rPr>
+                  <a:t>■仕事とエネルギーの定理</a:t>
+                </a:r>
+                <a:endParaRPr lang="en-US" altLang="ja-JP" sz="2400" b="1" dirty="0">
+                  <a:solidFill>
+                    <a:srgbClr val="FF0000"/>
+                  </a:solidFill>
+                </a:endParaRPr>
+              </a:p>
+              <a:p>
+                <a14:m>
+                  <m:oMath xmlns:m="http://schemas.openxmlformats.org/officeDocument/2006/math">
+                    <m:r>
+                      <a:rPr lang="en-US" altLang="ja-JP" sz="2400" b="0" i="1" smtClean="0">
+                        <a:latin typeface="Cambria Math" panose="02040503050406030204" pitchFamily="18" charset="0"/>
+                      </a:rPr>
+                      <m:t>𝑊</m:t>
+                    </m:r>
+                    <m:r>
+                      <a:rPr lang="en-US" altLang="ja-JP" sz="2400" b="0" i="1" smtClean="0">
+                        <a:latin typeface="Cambria Math" panose="02040503050406030204" pitchFamily="18" charset="0"/>
+                      </a:rPr>
+                      <m:t>=⊿</m:t>
+                    </m:r>
+                    <m:r>
+                      <a:rPr lang="en-US" altLang="ja-JP" sz="2400" b="0" i="1" smtClean="0">
+                        <a:latin typeface="Cambria Math" panose="02040503050406030204" pitchFamily="18" charset="0"/>
+                      </a:rPr>
+                      <m:t>𝐾𝐸</m:t>
+                    </m:r>
+                    <m:r>
+                      <a:rPr lang="en-US" altLang="ja-JP" sz="2400" b="0" i="1" smtClean="0">
+                        <a:latin typeface="Cambria Math" panose="02040503050406030204" pitchFamily="18" charset="0"/>
+                      </a:rPr>
+                      <m:t>=</m:t>
+                    </m:r>
+                    <m:sSub>
+                      <m:sSubPr>
+                        <m:ctrlPr>
+                          <a:rPr lang="en-US" altLang="ja-JP" sz="2400" b="0" i="1" smtClean="0">
+                            <a:latin typeface="Cambria Math" panose="02040503050406030204" pitchFamily="18" charset="0"/>
+                          </a:rPr>
+                        </m:ctrlPr>
+                      </m:sSubPr>
+                      <m:e>
+                        <m:r>
+                          <a:rPr lang="en-US" altLang="ja-JP" sz="2400" b="0" i="1" smtClean="0">
+                            <a:latin typeface="Cambria Math" panose="02040503050406030204" pitchFamily="18" charset="0"/>
+                          </a:rPr>
+                          <m:t>𝐾𝐸</m:t>
+                        </m:r>
+                      </m:e>
+                      <m:sub>
+                        <m:r>
+                          <a:rPr lang="en-US" altLang="ja-JP" sz="2400" b="0" i="1" smtClean="0">
+                            <a:latin typeface="Cambria Math" panose="02040503050406030204" pitchFamily="18" charset="0"/>
+                          </a:rPr>
+                          <m:t>𝑓</m:t>
+                        </m:r>
+                      </m:sub>
+                    </m:sSub>
+                    <m:r>
+                      <a:rPr lang="en-US" altLang="ja-JP" sz="2400" b="0" i="1" smtClean="0">
+                        <a:latin typeface="Cambria Math" panose="02040503050406030204" pitchFamily="18" charset="0"/>
+                      </a:rPr>
+                      <m:t>−</m:t>
+                    </m:r>
+                    <m:sSub>
+                      <m:sSubPr>
+                        <m:ctrlPr>
+                          <a:rPr lang="en-US" altLang="ja-JP" sz="2400" i="1">
+                            <a:latin typeface="Cambria Math" panose="02040503050406030204" pitchFamily="18" charset="0"/>
+                          </a:rPr>
+                        </m:ctrlPr>
+                      </m:sSubPr>
+                      <m:e>
+                        <m:r>
+                          <a:rPr lang="en-US" altLang="ja-JP" sz="2400" i="1">
+                            <a:latin typeface="Cambria Math" panose="02040503050406030204" pitchFamily="18" charset="0"/>
+                          </a:rPr>
+                          <m:t>𝐾𝐸</m:t>
+                        </m:r>
+                      </m:e>
+                      <m:sub>
+                        <m:r>
+                          <a:rPr lang="en-US" altLang="ja-JP" sz="2400" b="0" i="1" smtClean="0">
+                            <a:latin typeface="Cambria Math" panose="02040503050406030204" pitchFamily="18" charset="0"/>
+                          </a:rPr>
+                          <m:t>𝑖</m:t>
+                        </m:r>
+                      </m:sub>
+                    </m:sSub>
+                  </m:oMath>
+                </a14:m>
+                <a:r>
+                  <a:rPr lang="en-US" altLang="ja-JP" sz="2400" dirty="0"/>
+                  <a:t> </a:t>
+                </a:r>
+              </a:p>
+              <a:p>
+                <a:r>
+                  <a:rPr lang="ja-JP" altLang="en-US" sz="2400" dirty="0"/>
+                  <a:t>あるいは</a:t>
+                </a:r>
+                <a:endParaRPr lang="en-US" altLang="ja-JP" sz="2400" dirty="0"/>
+              </a:p>
+              <a:p>
+                <a14:m>
+                  <m:oMath xmlns:m="http://schemas.openxmlformats.org/officeDocument/2006/math">
+                    <m:r>
+                      <a:rPr lang="en-US" altLang="ja-JP" sz="2400" b="0" i="1" smtClean="0">
+                        <a:latin typeface="Cambria Math" panose="02040503050406030204" pitchFamily="18" charset="0"/>
+                      </a:rPr>
+                      <m:t>𝐹</m:t>
+                    </m:r>
+                    <m:r>
+                      <a:rPr lang="ja-JP" altLang="en-US" sz="2400" i="1">
+                        <a:latin typeface="Cambria Math" panose="02040503050406030204" pitchFamily="18" charset="0"/>
+                      </a:rPr>
+                      <m:t>⊿</m:t>
+                    </m:r>
+                    <m:r>
+                      <a:rPr lang="en-US" altLang="ja-JP" sz="2400" b="0" i="1" smtClean="0">
+                        <a:latin typeface="Cambria Math" panose="02040503050406030204" pitchFamily="18" charset="0"/>
+                      </a:rPr>
+                      <m:t>𝑥</m:t>
+                    </m:r>
+                    <m:r>
+                      <a:rPr lang="en-US" altLang="ja-JP" sz="2400" b="0" i="1" smtClean="0">
+                        <a:latin typeface="Cambria Math" panose="02040503050406030204" pitchFamily="18" charset="0"/>
+                      </a:rPr>
+                      <m:t>=</m:t>
+                    </m:r>
+                    <m:f>
+                      <m:fPr>
+                        <m:ctrlPr>
+                          <a:rPr lang="en-US" altLang="ja-JP" sz="2400" b="0" i="1" smtClean="0">
+                            <a:latin typeface="Cambria Math" panose="02040503050406030204" pitchFamily="18" charset="0"/>
+                          </a:rPr>
+                        </m:ctrlPr>
+                      </m:fPr>
+                      <m:num>
+                        <m:r>
+                          <a:rPr lang="en-US" altLang="ja-JP" sz="2400" b="0" i="1" smtClean="0">
+                            <a:latin typeface="Cambria Math" panose="02040503050406030204" pitchFamily="18" charset="0"/>
+                          </a:rPr>
+                          <m:t>1</m:t>
+                        </m:r>
+                      </m:num>
+                      <m:den>
+                        <m:r>
+                          <a:rPr lang="en-US" altLang="ja-JP" sz="2400" b="0" i="1" smtClean="0">
+                            <a:latin typeface="Cambria Math" panose="02040503050406030204" pitchFamily="18" charset="0"/>
+                          </a:rPr>
+                          <m:t>2</m:t>
+                        </m:r>
+                      </m:den>
+                    </m:f>
+                    <m:sSup>
+                      <m:sSupPr>
+                        <m:ctrlPr>
+                          <a:rPr lang="en-US" altLang="ja-JP" sz="2400" i="1" dirty="0" smtClean="0">
+                            <a:latin typeface="Cambria Math" panose="02040503050406030204" pitchFamily="18" charset="0"/>
+                          </a:rPr>
+                        </m:ctrlPr>
+                      </m:sSupPr>
+                      <m:e>
+                        <m:sSub>
+                          <m:sSubPr>
+                            <m:ctrlPr>
+                              <a:rPr lang="en-US" altLang="ja-JP" sz="2400" i="1" dirty="0" smtClean="0">
+                                <a:latin typeface="Cambria Math" panose="02040503050406030204" pitchFamily="18" charset="0"/>
+                              </a:rPr>
+                            </m:ctrlPr>
+                          </m:sSubPr>
+                          <m:e>
+                            <m:r>
+                              <a:rPr lang="en-US" altLang="ja-JP" sz="2400" b="0" i="1" dirty="0" smtClean="0">
+                                <a:latin typeface="Cambria Math" panose="02040503050406030204" pitchFamily="18" charset="0"/>
+                              </a:rPr>
+                              <m:t>𝑚𝑣</m:t>
+                            </m:r>
+                          </m:e>
+                          <m:sub>
+                            <m:r>
+                              <a:rPr lang="en-US" altLang="ja-JP" sz="2400" b="0" i="1" dirty="0" smtClean="0">
+                                <a:latin typeface="Cambria Math" panose="02040503050406030204" pitchFamily="18" charset="0"/>
+                              </a:rPr>
+                              <m:t>𝑓</m:t>
+                            </m:r>
+                          </m:sub>
+                        </m:sSub>
+                      </m:e>
+                      <m:sup>
+                        <m:r>
+                          <a:rPr lang="en-US" altLang="ja-JP" sz="2400" b="0" i="1" dirty="0" smtClean="0">
+                            <a:latin typeface="Cambria Math" panose="02040503050406030204" pitchFamily="18" charset="0"/>
+                          </a:rPr>
+                          <m:t>2</m:t>
+                        </m:r>
+                      </m:sup>
+                    </m:sSup>
+                    <m:r>
+                      <a:rPr lang="en-US" altLang="ja-JP" sz="2400" b="0" i="1" smtClean="0">
+                        <a:latin typeface="Cambria Math" panose="02040503050406030204" pitchFamily="18" charset="0"/>
+                      </a:rPr>
+                      <m:t>−</m:t>
+                    </m:r>
+                    <m:f>
+                      <m:fPr>
+                        <m:ctrlPr>
+                          <a:rPr lang="en-US" altLang="ja-JP" sz="2400" b="0" i="1" smtClean="0">
+                            <a:latin typeface="Cambria Math" panose="02040503050406030204" pitchFamily="18" charset="0"/>
+                          </a:rPr>
+                        </m:ctrlPr>
+                      </m:fPr>
+                      <m:num>
+                        <m:r>
+                          <a:rPr lang="en-US" altLang="ja-JP" sz="2400" b="0" i="1" smtClean="0">
+                            <a:latin typeface="Cambria Math" panose="02040503050406030204" pitchFamily="18" charset="0"/>
+                          </a:rPr>
+                          <m:t>1</m:t>
+                        </m:r>
+                      </m:num>
+                      <m:den>
+                        <m:r>
+                          <a:rPr lang="en-US" altLang="ja-JP" sz="2400" b="0" i="1" smtClean="0">
+                            <a:latin typeface="Cambria Math" panose="02040503050406030204" pitchFamily="18" charset="0"/>
+                          </a:rPr>
+                          <m:t>2</m:t>
+                        </m:r>
+                      </m:den>
+                    </m:f>
+                    <m:sSup>
+                      <m:sSupPr>
+                        <m:ctrlPr>
+                          <a:rPr lang="en-US" altLang="ja-JP" sz="2400" i="1" dirty="0">
+                            <a:latin typeface="Cambria Math" panose="02040503050406030204" pitchFamily="18" charset="0"/>
+                          </a:rPr>
+                        </m:ctrlPr>
+                      </m:sSupPr>
+                      <m:e>
+                        <m:sSub>
+                          <m:sSubPr>
+                            <m:ctrlPr>
+                              <a:rPr lang="en-US" altLang="ja-JP" sz="2400" i="1" dirty="0">
+                                <a:latin typeface="Cambria Math" panose="02040503050406030204" pitchFamily="18" charset="0"/>
+                              </a:rPr>
+                            </m:ctrlPr>
+                          </m:sSubPr>
+                          <m:e>
+                            <m:r>
+                              <a:rPr lang="en-US" altLang="ja-JP" sz="2400" i="1" dirty="0">
+                                <a:latin typeface="Cambria Math" panose="02040503050406030204" pitchFamily="18" charset="0"/>
+                              </a:rPr>
+                              <m:t>𝑚𝑣</m:t>
+                            </m:r>
+                          </m:e>
+                          <m:sub>
+                            <m:r>
+                              <a:rPr lang="en-US" altLang="ja-JP" sz="2400" b="0" i="1" dirty="0" smtClean="0">
+                                <a:latin typeface="Cambria Math" panose="02040503050406030204" pitchFamily="18" charset="0"/>
+                              </a:rPr>
+                              <m:t>𝑖</m:t>
+                            </m:r>
+                          </m:sub>
+                        </m:sSub>
+                      </m:e>
+                      <m:sup>
+                        <m:r>
+                          <a:rPr lang="en-US" altLang="ja-JP" sz="2400" i="1" dirty="0">
+                            <a:latin typeface="Cambria Math" panose="02040503050406030204" pitchFamily="18" charset="0"/>
+                          </a:rPr>
+                          <m:t>2</m:t>
+                        </m:r>
+                      </m:sup>
+                    </m:sSup>
+                  </m:oMath>
+                </a14:m>
+                <a:r>
+                  <a:rPr lang="en-US" altLang="ja-JP" sz="2400" dirty="0"/>
+                  <a:t> </a:t>
+                </a:r>
+              </a:p>
+              <a:p>
+                <a:endParaRPr lang="en-US" altLang="ja-JP" sz="2400" dirty="0"/>
+              </a:p>
+              <a:p>
+                <a14:m>
+                  <m:oMath xmlns:m="http://schemas.openxmlformats.org/officeDocument/2006/math">
+                    <m:r>
+                      <a:rPr lang="en-US" altLang="ja-JP" sz="2400" b="0" i="1" smtClean="0">
+                        <a:latin typeface="Cambria Math" panose="02040503050406030204" pitchFamily="18" charset="0"/>
+                      </a:rPr>
+                      <m:t>𝑊</m:t>
+                    </m:r>
+                  </m:oMath>
+                </a14:m>
+                <a:r>
+                  <a:rPr lang="en-US" altLang="ja-JP" sz="2400" dirty="0"/>
+                  <a:t>	</a:t>
+                </a:r>
+                <a:r>
+                  <a:rPr lang="ja-JP" altLang="en-US" sz="2400" dirty="0"/>
+                  <a:t>・・・仕事</a:t>
+                </a:r>
+                <a:endParaRPr lang="en-US" altLang="ja-JP" sz="2400" dirty="0"/>
+              </a:p>
+              <a:p>
+                <a14:m>
+                  <m:oMath xmlns:m="http://schemas.openxmlformats.org/officeDocument/2006/math">
+                    <m:r>
+                      <a:rPr lang="en-US" altLang="ja-JP" sz="2400" b="0" i="1" smtClean="0">
+                        <a:latin typeface="Cambria Math" panose="02040503050406030204" pitchFamily="18" charset="0"/>
+                      </a:rPr>
+                      <m:t>𝐾𝐸</m:t>
+                    </m:r>
+                  </m:oMath>
+                </a14:m>
+                <a:r>
+                  <a:rPr lang="en-US" altLang="ja-JP" sz="2400" dirty="0"/>
+                  <a:t>	</a:t>
+                </a:r>
+                <a:r>
+                  <a:rPr lang="ja-JP" altLang="en-US" sz="2400" dirty="0"/>
+                  <a:t>・・・運動エネルギー</a:t>
+                </a:r>
+                <a:endParaRPr lang="en-US" altLang="ja-JP" sz="2400" dirty="0"/>
+              </a:p>
+              <a:p>
+                <a14:m>
+                  <m:oMath xmlns:m="http://schemas.openxmlformats.org/officeDocument/2006/math">
+                    <m:r>
+                      <a:rPr lang="en-US" altLang="ja-JP" sz="2400" b="0" i="1" smtClean="0">
+                        <a:latin typeface="Cambria Math" panose="02040503050406030204" pitchFamily="18" charset="0"/>
+                      </a:rPr>
+                      <m:t>𝐹</m:t>
+                    </m:r>
+                  </m:oMath>
+                </a14:m>
+                <a:r>
+                  <a:rPr lang="en-US" altLang="ja-JP" sz="2400" dirty="0"/>
+                  <a:t>	</a:t>
+                </a:r>
+                <a:r>
+                  <a:rPr lang="ja-JP" altLang="en-US" sz="2400" dirty="0"/>
+                  <a:t>・・・力</a:t>
+                </a:r>
+                <a:endParaRPr lang="en-US" altLang="ja-JP" sz="2400" dirty="0"/>
+              </a:p>
+              <a:p>
+                <a14:m>
+                  <m:oMath xmlns:m="http://schemas.openxmlformats.org/officeDocument/2006/math">
+                    <m:r>
+                      <a:rPr lang="en-US" altLang="ja-JP" sz="2400" b="0" i="1" dirty="0" smtClean="0">
+                        <a:latin typeface="Cambria Math" panose="02040503050406030204" pitchFamily="18" charset="0"/>
+                      </a:rPr>
+                      <m:t>𝑚</m:t>
+                    </m:r>
+                  </m:oMath>
+                </a14:m>
+                <a:r>
+                  <a:rPr lang="en-US" altLang="ja-JP" sz="2400" dirty="0"/>
+                  <a:t>	</a:t>
+                </a:r>
+                <a:r>
+                  <a:rPr lang="ja-JP" altLang="en-US" sz="2400" dirty="0"/>
+                  <a:t>・・・質量</a:t>
+                </a:r>
+                <a:endParaRPr lang="en-US" altLang="ja-JP" sz="2400" dirty="0"/>
+              </a:p>
+              <a:p>
+                <a14:m>
+                  <m:oMath xmlns:m="http://schemas.openxmlformats.org/officeDocument/2006/math">
+                    <m:r>
+                      <a:rPr lang="en-US" altLang="ja-JP" sz="2400" i="1" dirty="0" smtClean="0">
+                        <a:latin typeface="Cambria Math" panose="02040503050406030204" pitchFamily="18" charset="0"/>
+                      </a:rPr>
+                      <m:t>𝑣</m:t>
+                    </m:r>
+                  </m:oMath>
+                </a14:m>
+                <a:r>
+                  <a:rPr lang="en-US" altLang="ja-JP" sz="2400" dirty="0"/>
+                  <a:t>	</a:t>
+                </a:r>
+                <a:r>
+                  <a:rPr lang="ja-JP" altLang="en-US" sz="2400" dirty="0"/>
+                  <a:t>・・・速さ</a:t>
+                </a:r>
+                <a:endParaRPr lang="en-US" altLang="ja-JP" sz="2400" dirty="0"/>
+              </a:p>
+              <a:p>
+                <a:endParaRPr lang="en-US" altLang="ja-JP" sz="2400" dirty="0"/>
+              </a:p>
+              <a:p>
+                <a:r>
+                  <a:rPr lang="ja-JP" altLang="en-US" sz="2400" dirty="0"/>
+                  <a:t>これを使えば変位と力から速さを計算することができます。</a:t>
+                </a:r>
+                <a:endParaRPr lang="en-US" altLang="ja-JP" sz="2400" dirty="0"/>
+              </a:p>
+            </p:txBody>
+          </p:sp>
+        </mc:Choice>
+        <mc:Fallback>
+          <p:sp>
+            <p:nvSpPr>
+              <p:cNvPr id="6" name="テキスト ボックス 5">
+                <a:extLst>
+                  <a:ext uri="{FF2B5EF4-FFF2-40B4-BE49-F238E27FC236}">
+                    <a16:creationId xmlns:a16="http://schemas.microsoft.com/office/drawing/2014/main" id="{55830AD6-028B-4C4E-80BF-B70DFC1C3A46}"/>
+                  </a:ext>
+                </a:extLst>
+              </p:cNvPr>
+              <p:cNvSpPr txBox="1">
+                <a:spLocks noRot="1" noChangeAspect="1" noMove="1" noResize="1" noEditPoints="1" noAdjustHandles="1" noChangeArrowheads="1" noChangeShapeType="1" noTextEdit="1"/>
+              </p:cNvSpPr>
+              <p:nvPr/>
+            </p:nvSpPr>
+            <p:spPr>
+              <a:xfrm>
+                <a:off x="567542" y="1216429"/>
+                <a:ext cx="10033516" cy="5444824"/>
+              </a:xfrm>
+              <a:prstGeom prst="rect">
+                <a:avLst/>
+              </a:prstGeom>
+              <a:blipFill>
+                <a:blip r:embed="rId2"/>
+                <a:stretch>
+                  <a:fillRect l="-911" t="-896" b="-1568"/>
+                </a:stretch>
+              </a:blipFill>
+            </p:spPr>
+            <p:txBody>
+              <a:bodyPr/>
+              <a:lstStyle/>
+              <a:p>
+                <a:r>
+                  <a:rPr lang="ja-JP" altLang="en-US">
+                    <a:noFill/>
+                  </a:rPr>
+                  <a:t> </a:t>
+                </a:r>
+              </a:p>
+            </p:txBody>
+          </p:sp>
+        </mc:Fallback>
+      </mc:AlternateContent>
+    </p:spTree>
+    <p:extLst>
+      <p:ext uri="{BB962C8B-B14F-4D97-AF65-F5344CB8AC3E}">
+        <p14:creationId xmlns:p14="http://schemas.microsoft.com/office/powerpoint/2010/main" val="2828119735"/>
+      </p:ext>
+    </p:extLst>
+  </p:cSld>
+  <p:clrMapOvr>
+    <a:masterClrMapping/>
+  </p:clrMapOvr>
+</p:sld>
+</file>
+
+<file path=ppt/slides/slide5.xml><?xml version="1.0" encoding="utf-8"?>
+<p:sld xmlns:a="http://schemas.openxmlformats.org/drawingml/2006/main" xmlns:r="http://schemas.openxmlformats.org/officeDocument/2006/relationships" xmlns:p="http://schemas.openxmlformats.org/presentationml/2006/main">
+  <p:cSld>
+    <p:spTree>
+      <p:nvGrpSpPr>
+        <p:cNvPr id="1" name=""/>
+        <p:cNvGrpSpPr/>
+        <p:nvPr/>
+      </p:nvGrpSpPr>
+      <p:grpSpPr>
+        <a:xfrm>
+          <a:off x="0" y="0"/>
+          <a:ext cx="0" cy="0"/>
+          <a:chOff x="0" y="0"/>
+          <a:chExt cx="0" cy="0"/>
+        </a:xfrm>
+      </p:grpSpPr>
+      <p:sp>
+        <p:nvSpPr>
+          <p:cNvPr id="4" name="テキスト ボックス 3">
+            <a:extLst>
+              <a:ext uri="{FF2B5EF4-FFF2-40B4-BE49-F238E27FC236}">
+                <a16:creationId xmlns:a16="http://schemas.microsoft.com/office/drawing/2014/main" id="{5A13BF46-B8C5-48AA-8308-C9ECFF431A18}"/>
+              </a:ext>
+            </a:extLst>
+          </p:cNvPr>
+          <p:cNvSpPr txBox="1"/>
+          <p:nvPr/>
+        </p:nvSpPr>
+        <p:spPr>
+          <a:xfrm>
+            <a:off x="567542" y="491954"/>
+            <a:ext cx="3995004" cy="584775"/>
+          </a:xfrm>
+          <a:prstGeom prst="rect">
+            <a:avLst/>
+          </a:prstGeom>
+          <a:noFill/>
+        </p:spPr>
+        <p:txBody>
+          <a:bodyPr wrap="none" rtlCol="0">
+            <a:spAutoFit/>
+          </a:bodyPr>
+          <a:lstStyle/>
+          <a:p>
+            <a:r>
+              <a:rPr kumimoji="1" lang="ja-JP" altLang="en-US" sz="3200" b="1" u="sng" dirty="0"/>
+              <a:t>運動エネルギー 例題</a:t>
+            </a:r>
+            <a:endParaRPr kumimoji="1" lang="en-US" altLang="ja-JP" sz="3200" b="1" u="sng" dirty="0"/>
+          </a:p>
+        </p:txBody>
+      </p:sp>
+      <mc:AlternateContent xmlns:mc="http://schemas.openxmlformats.org/markup-compatibility/2006">
+        <mc:Choice xmlns:a14="http://schemas.microsoft.com/office/drawing/2010/main" Requires="a14">
+          <p:sp>
+            <p:nvSpPr>
+              <p:cNvPr id="6" name="テキスト ボックス 5">
+                <a:extLst>
+                  <a:ext uri="{FF2B5EF4-FFF2-40B4-BE49-F238E27FC236}">
+                    <a16:creationId xmlns:a16="http://schemas.microsoft.com/office/drawing/2014/main" id="{55830AD6-028B-4C4E-80BF-B70DFC1C3A46}"/>
+                  </a:ext>
+                </a:extLst>
+              </p:cNvPr>
+              <p:cNvSpPr txBox="1"/>
+              <p:nvPr/>
+            </p:nvSpPr>
+            <p:spPr>
+              <a:xfrm>
+                <a:off x="567542" y="1216429"/>
+                <a:ext cx="10649069" cy="5377498"/>
+              </a:xfrm>
+              <a:prstGeom prst="rect">
+                <a:avLst/>
+              </a:prstGeom>
+              <a:noFill/>
+            </p:spPr>
+            <p:txBody>
+              <a:bodyPr wrap="none" rtlCol="0">
+                <a:spAutoFit/>
+              </a:bodyPr>
+              <a:lstStyle/>
+              <a:p>
+                <a:r>
+                  <a:rPr lang="ja-JP" altLang="en-US" sz="2400" dirty="0"/>
+                  <a:t>野球のボールを振りかぶって投げました。</a:t>
+                </a:r>
+                <a:endParaRPr lang="en-US" altLang="ja-JP" sz="2400" dirty="0"/>
+              </a:p>
+              <a:p>
+                <a:r>
+                  <a:rPr lang="ja-JP" altLang="en-US" sz="2400" dirty="0"/>
+                  <a:t>ボールが手から離れたときの状況が以下のとき、ボールの速さを求めなさい</a:t>
+                </a:r>
+                <a:endParaRPr lang="en-US" altLang="ja-JP" sz="2400" dirty="0"/>
+              </a:p>
+              <a:p>
+                <a:r>
+                  <a:rPr lang="ja-JP" altLang="en-US" sz="2400" dirty="0"/>
+                  <a:t>・振りかぶってボールが手から離れるまでの距離：</a:t>
+                </a:r>
+                <a14:m>
+                  <m:oMath xmlns:m="http://schemas.openxmlformats.org/officeDocument/2006/math">
+                    <m:r>
+                      <a:rPr lang="en-US" altLang="ja-JP" sz="2400" i="1" dirty="0" smtClean="0">
+                        <a:latin typeface="Cambria Math" panose="02040503050406030204" pitchFamily="18" charset="0"/>
+                      </a:rPr>
+                      <m:t>0.75</m:t>
+                    </m:r>
+                    <m:r>
+                      <a:rPr lang="en-US" altLang="ja-JP" sz="2400" i="1" dirty="0" smtClean="0">
+                        <a:latin typeface="Cambria Math" panose="02040503050406030204" pitchFamily="18" charset="0"/>
+                      </a:rPr>
+                      <m:t>𝑚</m:t>
+                    </m:r>
+                  </m:oMath>
+                </a14:m>
+                <a:endParaRPr lang="en-US" altLang="ja-JP" sz="2400" dirty="0"/>
+              </a:p>
+              <a:p>
+                <a:r>
+                  <a:rPr lang="ja-JP" altLang="en-US" sz="2400" dirty="0"/>
+                  <a:t>・手から離れたときにボールに伝わる力：</a:t>
+                </a:r>
+                <a14:m>
+                  <m:oMath xmlns:m="http://schemas.openxmlformats.org/officeDocument/2006/math">
+                    <m:r>
+                      <a:rPr lang="en-US" altLang="ja-JP" sz="2400" i="1" dirty="0" smtClean="0">
+                        <a:latin typeface="Cambria Math" panose="02040503050406030204" pitchFamily="18" charset="0"/>
+                      </a:rPr>
+                      <m:t>400</m:t>
+                    </m:r>
+                    <m:r>
+                      <a:rPr lang="en-US" altLang="ja-JP" sz="2400" i="1" dirty="0" smtClean="0">
+                        <a:latin typeface="Cambria Math" panose="02040503050406030204" pitchFamily="18" charset="0"/>
+                      </a:rPr>
+                      <m:t>𝑁</m:t>
+                    </m:r>
+                  </m:oMath>
+                </a14:m>
+                <a:endParaRPr lang="en-US" altLang="ja-JP" sz="2400" dirty="0"/>
+              </a:p>
+              <a:p>
+                <a:r>
+                  <a:rPr lang="ja-JP" altLang="en-US" sz="2400" dirty="0"/>
+                  <a:t>・ボールの質量：</a:t>
+                </a:r>
+                <a14:m>
+                  <m:oMath xmlns:m="http://schemas.openxmlformats.org/officeDocument/2006/math">
+                    <m:r>
+                      <a:rPr lang="en-US" altLang="ja-JP" sz="2400" i="1" dirty="0" smtClean="0">
+                        <a:latin typeface="Cambria Math" panose="02040503050406030204" pitchFamily="18" charset="0"/>
+                      </a:rPr>
+                      <m:t>145</m:t>
+                    </m:r>
+                    <m:r>
+                      <a:rPr lang="en-US" altLang="ja-JP" sz="2400" i="1" dirty="0" smtClean="0">
+                        <a:latin typeface="Cambria Math" panose="02040503050406030204" pitchFamily="18" charset="0"/>
+                      </a:rPr>
+                      <m:t>𝑔</m:t>
+                    </m:r>
+                  </m:oMath>
+                </a14:m>
+                <a:endParaRPr lang="en-US" altLang="ja-JP" sz="2400" dirty="0"/>
+              </a:p>
+              <a:p>
+                <a:endParaRPr lang="en-US" altLang="ja-JP" sz="2400" dirty="0"/>
+              </a:p>
+              <a:p>
+                <a:r>
+                  <a:rPr lang="ja-JP" altLang="en-US" sz="2400" b="1" dirty="0">
+                    <a:solidFill>
+                      <a:srgbClr val="FF0000"/>
+                    </a:solidFill>
+                  </a:rPr>
+                  <a:t>■解答</a:t>
+                </a:r>
+                <a:endParaRPr lang="en-US" altLang="ja-JP" sz="2400" b="1" dirty="0">
+                  <a:solidFill>
+                    <a:srgbClr val="FF0000"/>
+                  </a:solidFill>
+                </a:endParaRPr>
+              </a:p>
+              <a:p>
+                <a:r>
+                  <a:rPr lang="ja-JP" altLang="en-US" sz="2400" dirty="0"/>
+                  <a:t>ボールは手から離れるまでは動かないので </a:t>
+                </a:r>
+                <a14:m>
+                  <m:oMath xmlns:m="http://schemas.openxmlformats.org/officeDocument/2006/math">
+                    <m:sSub>
+                      <m:sSubPr>
+                        <m:ctrlPr>
+                          <a:rPr lang="en-US" altLang="ja-JP" sz="2400" i="1" dirty="0" smtClean="0">
+                            <a:latin typeface="Cambria Math" panose="02040503050406030204" pitchFamily="18" charset="0"/>
+                          </a:rPr>
+                        </m:ctrlPr>
+                      </m:sSubPr>
+                      <m:e>
+                        <m:r>
+                          <a:rPr lang="en-US" altLang="ja-JP" sz="2400" i="1" dirty="0">
+                            <a:latin typeface="Cambria Math" panose="02040503050406030204" pitchFamily="18" charset="0"/>
+                          </a:rPr>
+                          <m:t>𝑣</m:t>
+                        </m:r>
+                      </m:e>
+                      <m:sub>
+                        <m:r>
+                          <a:rPr lang="en-US" altLang="ja-JP" sz="2400" b="0" i="1" dirty="0" smtClean="0">
+                            <a:latin typeface="Cambria Math" panose="02040503050406030204" pitchFamily="18" charset="0"/>
+                          </a:rPr>
+                          <m:t>𝑖</m:t>
+                        </m:r>
+                      </m:sub>
+                    </m:sSub>
+                    <m:r>
+                      <a:rPr lang="en-US" altLang="ja-JP" sz="2400" b="0" i="1" dirty="0" smtClean="0">
+                        <a:latin typeface="Cambria Math" panose="02040503050406030204" pitchFamily="18" charset="0"/>
+                      </a:rPr>
+                      <m:t>=0 </m:t>
+                    </m:r>
+                    <m:r>
+                      <a:rPr lang="ja-JP" altLang="en-US" sz="2400" i="1" dirty="0">
+                        <a:latin typeface="Cambria Math" panose="02040503050406030204" pitchFamily="18" charset="0"/>
+                      </a:rPr>
+                      <m:t>である</m:t>
+                    </m:r>
+                  </m:oMath>
+                </a14:m>
+                <a:endParaRPr lang="en-US" altLang="ja-JP" sz="2400" dirty="0"/>
+              </a:p>
+              <a:p>
+                <a14:m>
+                  <m:oMath xmlns:m="http://schemas.openxmlformats.org/officeDocument/2006/math">
+                    <m:r>
+                      <a:rPr lang="en-US" altLang="ja-JP" sz="2400" b="0" i="1" smtClean="0">
+                        <a:latin typeface="Cambria Math" panose="02040503050406030204" pitchFamily="18" charset="0"/>
+                      </a:rPr>
+                      <m:t>𝐹</m:t>
+                    </m:r>
+                    <m:r>
+                      <a:rPr lang="ja-JP" altLang="en-US" sz="2400" i="1">
+                        <a:latin typeface="Cambria Math" panose="02040503050406030204" pitchFamily="18" charset="0"/>
+                      </a:rPr>
+                      <m:t>⊿</m:t>
+                    </m:r>
+                    <m:r>
+                      <a:rPr lang="en-US" altLang="ja-JP" sz="2400" b="0" i="1" smtClean="0">
+                        <a:latin typeface="Cambria Math" panose="02040503050406030204" pitchFamily="18" charset="0"/>
+                      </a:rPr>
+                      <m:t>𝑥</m:t>
+                    </m:r>
+                    <m:r>
+                      <a:rPr lang="en-US" altLang="ja-JP" sz="2400" b="0" i="1" smtClean="0">
+                        <a:latin typeface="Cambria Math" panose="02040503050406030204" pitchFamily="18" charset="0"/>
+                      </a:rPr>
+                      <m:t>=</m:t>
+                    </m:r>
+                    <m:f>
+                      <m:fPr>
+                        <m:ctrlPr>
+                          <a:rPr lang="en-US" altLang="ja-JP" sz="2400" b="0" i="1" smtClean="0">
+                            <a:latin typeface="Cambria Math" panose="02040503050406030204" pitchFamily="18" charset="0"/>
+                          </a:rPr>
+                        </m:ctrlPr>
+                      </m:fPr>
+                      <m:num>
+                        <m:r>
+                          <a:rPr lang="en-US" altLang="ja-JP" sz="2400" b="0" i="1" smtClean="0">
+                            <a:latin typeface="Cambria Math" panose="02040503050406030204" pitchFamily="18" charset="0"/>
+                          </a:rPr>
+                          <m:t>1</m:t>
+                        </m:r>
+                      </m:num>
+                      <m:den>
+                        <m:r>
+                          <a:rPr lang="en-US" altLang="ja-JP" sz="2400" b="0" i="1" smtClean="0">
+                            <a:latin typeface="Cambria Math" panose="02040503050406030204" pitchFamily="18" charset="0"/>
+                          </a:rPr>
+                          <m:t>2</m:t>
+                        </m:r>
+                      </m:den>
+                    </m:f>
+                    <m:sSup>
+                      <m:sSupPr>
+                        <m:ctrlPr>
+                          <a:rPr lang="en-US" altLang="ja-JP" sz="2400" i="1" dirty="0" smtClean="0">
+                            <a:latin typeface="Cambria Math" panose="02040503050406030204" pitchFamily="18" charset="0"/>
+                          </a:rPr>
+                        </m:ctrlPr>
+                      </m:sSupPr>
+                      <m:e>
+                        <m:sSub>
+                          <m:sSubPr>
+                            <m:ctrlPr>
+                              <a:rPr lang="en-US" altLang="ja-JP" sz="2400" i="1" dirty="0" smtClean="0">
+                                <a:latin typeface="Cambria Math" panose="02040503050406030204" pitchFamily="18" charset="0"/>
+                              </a:rPr>
+                            </m:ctrlPr>
+                          </m:sSubPr>
+                          <m:e>
+                            <m:r>
+                              <a:rPr lang="en-US" altLang="ja-JP" sz="2400" b="0" i="1" dirty="0" smtClean="0">
+                                <a:latin typeface="Cambria Math" panose="02040503050406030204" pitchFamily="18" charset="0"/>
+                              </a:rPr>
+                              <m:t>𝑚𝑣</m:t>
+                            </m:r>
+                          </m:e>
+                          <m:sub>
+                            <m:r>
+                              <a:rPr lang="en-US" altLang="ja-JP" sz="2400" b="0" i="1" dirty="0" smtClean="0">
+                                <a:latin typeface="Cambria Math" panose="02040503050406030204" pitchFamily="18" charset="0"/>
+                              </a:rPr>
+                              <m:t>𝑓</m:t>
+                            </m:r>
+                          </m:sub>
+                        </m:sSub>
+                      </m:e>
+                      <m:sup>
+                        <m:r>
+                          <a:rPr lang="en-US" altLang="ja-JP" sz="2400" b="0" i="1" dirty="0" smtClean="0">
+                            <a:latin typeface="Cambria Math" panose="02040503050406030204" pitchFamily="18" charset="0"/>
+                          </a:rPr>
+                          <m:t>2</m:t>
+                        </m:r>
+                      </m:sup>
+                    </m:sSup>
+                    <m:r>
+                      <a:rPr lang="en-US" altLang="ja-JP" sz="2400" b="0" i="1" smtClean="0">
+                        <a:latin typeface="Cambria Math" panose="02040503050406030204" pitchFamily="18" charset="0"/>
+                      </a:rPr>
+                      <m:t>−</m:t>
+                    </m:r>
+                    <m:f>
+                      <m:fPr>
+                        <m:ctrlPr>
+                          <a:rPr lang="en-US" altLang="ja-JP" sz="2400" b="0" i="1" smtClean="0">
+                            <a:latin typeface="Cambria Math" panose="02040503050406030204" pitchFamily="18" charset="0"/>
+                          </a:rPr>
+                        </m:ctrlPr>
+                      </m:fPr>
+                      <m:num>
+                        <m:r>
+                          <a:rPr lang="en-US" altLang="ja-JP" sz="2400" b="0" i="1" smtClean="0">
+                            <a:latin typeface="Cambria Math" panose="02040503050406030204" pitchFamily="18" charset="0"/>
+                          </a:rPr>
+                          <m:t>1</m:t>
+                        </m:r>
+                      </m:num>
+                      <m:den>
+                        <m:r>
+                          <a:rPr lang="en-US" altLang="ja-JP" sz="2400" b="0" i="1" smtClean="0">
+                            <a:latin typeface="Cambria Math" panose="02040503050406030204" pitchFamily="18" charset="0"/>
+                          </a:rPr>
+                          <m:t>2</m:t>
+                        </m:r>
+                      </m:den>
+                    </m:f>
+                    <m:sSup>
+                      <m:sSupPr>
+                        <m:ctrlPr>
+                          <a:rPr lang="en-US" altLang="ja-JP" sz="2400" i="1" dirty="0">
+                            <a:latin typeface="Cambria Math" panose="02040503050406030204" pitchFamily="18" charset="0"/>
+                          </a:rPr>
+                        </m:ctrlPr>
+                      </m:sSupPr>
+                      <m:e>
+                        <m:sSub>
+                          <m:sSubPr>
+                            <m:ctrlPr>
+                              <a:rPr lang="en-US" altLang="ja-JP" sz="2400" i="1" dirty="0">
+                                <a:latin typeface="Cambria Math" panose="02040503050406030204" pitchFamily="18" charset="0"/>
+                              </a:rPr>
+                            </m:ctrlPr>
+                          </m:sSubPr>
+                          <m:e>
+                            <m:r>
+                              <a:rPr lang="en-US" altLang="ja-JP" sz="2400" i="1" dirty="0">
+                                <a:latin typeface="Cambria Math" panose="02040503050406030204" pitchFamily="18" charset="0"/>
+                              </a:rPr>
+                              <m:t>𝑚𝑣</m:t>
+                            </m:r>
+                          </m:e>
+                          <m:sub>
+                            <m:r>
+                              <a:rPr lang="en-US" altLang="ja-JP" sz="2400" b="0" i="1" dirty="0" smtClean="0">
+                                <a:latin typeface="Cambria Math" panose="02040503050406030204" pitchFamily="18" charset="0"/>
+                              </a:rPr>
+                              <m:t>𝑖</m:t>
+                            </m:r>
+                          </m:sub>
+                        </m:sSub>
+                      </m:e>
+                      <m:sup>
+                        <m:r>
+                          <a:rPr lang="en-US" altLang="ja-JP" sz="2400" i="1" dirty="0">
+                            <a:latin typeface="Cambria Math" panose="02040503050406030204" pitchFamily="18" charset="0"/>
+                          </a:rPr>
+                          <m:t>2</m:t>
+                        </m:r>
+                      </m:sup>
+                    </m:sSup>
+                  </m:oMath>
+                </a14:m>
+                <a:r>
+                  <a:rPr lang="en-US" altLang="ja-JP" sz="2400" dirty="0"/>
+                  <a:t> </a:t>
+                </a:r>
+                <a:r>
+                  <a:rPr lang="ja-JP" altLang="en-US" sz="2400" dirty="0"/>
+                  <a:t>より</a:t>
+                </a:r>
+                <a:endParaRPr lang="en-US" altLang="ja-JP" sz="2400" dirty="0"/>
+              </a:p>
+              <a:p>
+                <a14:m>
+                  <m:oMath xmlns:m="http://schemas.openxmlformats.org/officeDocument/2006/math">
+                    <m:r>
+                      <a:rPr lang="en-US" altLang="ja-JP" sz="2400" b="0" i="1" smtClean="0">
+                        <a:latin typeface="Cambria Math" panose="02040503050406030204" pitchFamily="18" charset="0"/>
+                      </a:rPr>
+                      <m:t>400</m:t>
+                    </m:r>
+                    <m:r>
+                      <a:rPr lang="en-US" altLang="ja-JP" sz="2400" b="0" i="1" smtClean="0">
+                        <a:latin typeface="Cambria Math" panose="02040503050406030204" pitchFamily="18" charset="0"/>
+                      </a:rPr>
+                      <m:t>𝑁</m:t>
+                    </m:r>
+                    <m:d>
+                      <m:dPr>
+                        <m:ctrlPr>
+                          <a:rPr lang="en-US" altLang="ja-JP" sz="2400" b="0" i="1" smtClean="0">
+                            <a:latin typeface="Cambria Math" panose="02040503050406030204" pitchFamily="18" charset="0"/>
+                          </a:rPr>
+                        </m:ctrlPr>
+                      </m:dPr>
+                      <m:e>
+                        <m:r>
+                          <a:rPr lang="en-US" altLang="ja-JP" sz="2400" b="0" i="1" smtClean="0">
+                            <a:latin typeface="Cambria Math" panose="02040503050406030204" pitchFamily="18" charset="0"/>
+                          </a:rPr>
+                          <m:t>0.75</m:t>
+                        </m:r>
+                        <m:r>
+                          <a:rPr lang="en-US" altLang="ja-JP" sz="2400" b="0" i="1" smtClean="0">
+                            <a:latin typeface="Cambria Math" panose="02040503050406030204" pitchFamily="18" charset="0"/>
+                          </a:rPr>
+                          <m:t>𝑚</m:t>
+                        </m:r>
+                      </m:e>
+                    </m:d>
+                    <m:r>
+                      <a:rPr lang="en-US" altLang="ja-JP" sz="2400" b="0" i="1" smtClean="0">
+                        <a:latin typeface="Cambria Math" panose="02040503050406030204" pitchFamily="18" charset="0"/>
+                      </a:rPr>
+                      <m:t>=</m:t>
+                    </m:r>
+                    <m:f>
+                      <m:fPr>
+                        <m:ctrlPr>
+                          <a:rPr lang="en-US" altLang="ja-JP" sz="2400" b="0" i="1" smtClean="0">
+                            <a:latin typeface="Cambria Math" panose="02040503050406030204" pitchFamily="18" charset="0"/>
+                          </a:rPr>
+                        </m:ctrlPr>
+                      </m:fPr>
+                      <m:num>
+                        <m:r>
+                          <a:rPr lang="en-US" altLang="ja-JP" sz="2400" b="0" i="1" smtClean="0">
+                            <a:latin typeface="Cambria Math" panose="02040503050406030204" pitchFamily="18" charset="0"/>
+                          </a:rPr>
+                          <m:t>1</m:t>
+                        </m:r>
+                      </m:num>
+                      <m:den>
+                        <m:r>
+                          <a:rPr lang="en-US" altLang="ja-JP" sz="2400" b="0" i="1" smtClean="0">
+                            <a:latin typeface="Cambria Math" panose="02040503050406030204" pitchFamily="18" charset="0"/>
+                          </a:rPr>
+                          <m:t>2</m:t>
+                        </m:r>
+                      </m:den>
+                    </m:f>
+                    <m:sSup>
+                      <m:sSupPr>
+                        <m:ctrlPr>
+                          <a:rPr lang="en-US" altLang="ja-JP" sz="2400" i="1" dirty="0" smtClean="0">
+                            <a:latin typeface="Cambria Math" panose="02040503050406030204" pitchFamily="18" charset="0"/>
+                          </a:rPr>
+                        </m:ctrlPr>
+                      </m:sSupPr>
+                      <m:e>
+                        <m:sSub>
+                          <m:sSubPr>
+                            <m:ctrlPr>
+                              <a:rPr lang="en-US" altLang="ja-JP" sz="2400" i="1" dirty="0" smtClean="0">
+                                <a:latin typeface="Cambria Math" panose="02040503050406030204" pitchFamily="18" charset="0"/>
+                              </a:rPr>
+                            </m:ctrlPr>
+                          </m:sSubPr>
+                          <m:e>
+                            <m:r>
+                              <a:rPr lang="en-US" altLang="ja-JP" sz="2400" b="0" i="1" dirty="0" smtClean="0">
+                                <a:latin typeface="Cambria Math" panose="02040503050406030204" pitchFamily="18" charset="0"/>
+                              </a:rPr>
+                              <m:t>(0.145</m:t>
+                            </m:r>
+                            <m:r>
+                              <a:rPr lang="en-US" altLang="ja-JP" sz="2400" b="0" i="1" dirty="0" smtClean="0">
+                                <a:latin typeface="Cambria Math" panose="02040503050406030204" pitchFamily="18" charset="0"/>
+                              </a:rPr>
+                              <m:t>𝑘𝑔</m:t>
+                            </m:r>
+                            <m:r>
+                              <a:rPr lang="en-US" altLang="ja-JP" sz="2400" b="0" i="1" dirty="0" smtClean="0">
+                                <a:latin typeface="Cambria Math" panose="02040503050406030204" pitchFamily="18" charset="0"/>
+                              </a:rPr>
+                              <m:t>)(</m:t>
+                            </m:r>
+                            <m:r>
+                              <a:rPr lang="en-US" altLang="ja-JP" sz="2400" b="0" i="1" dirty="0" smtClean="0">
+                                <a:latin typeface="Cambria Math" panose="02040503050406030204" pitchFamily="18" charset="0"/>
+                              </a:rPr>
+                              <m:t>𝑣</m:t>
+                            </m:r>
+                          </m:e>
+                          <m:sub>
+                            <m:r>
+                              <a:rPr lang="en-US" altLang="ja-JP" sz="2400" b="0" i="1" dirty="0" smtClean="0">
+                                <a:latin typeface="Cambria Math" panose="02040503050406030204" pitchFamily="18" charset="0"/>
+                              </a:rPr>
+                              <m:t>𝑓</m:t>
+                            </m:r>
+                          </m:sub>
+                        </m:sSub>
+                        <m:r>
+                          <a:rPr lang="en-US" altLang="ja-JP" sz="2400" b="0" i="1" dirty="0" smtClean="0">
+                            <a:latin typeface="Cambria Math" panose="02040503050406030204" pitchFamily="18" charset="0"/>
+                          </a:rPr>
+                          <m:t>)</m:t>
+                        </m:r>
+                      </m:e>
+                      <m:sup>
+                        <m:r>
+                          <a:rPr lang="en-US" altLang="ja-JP" sz="2400" b="0" i="1" dirty="0" smtClean="0">
+                            <a:latin typeface="Cambria Math" panose="02040503050406030204" pitchFamily="18" charset="0"/>
+                          </a:rPr>
+                          <m:t>2</m:t>
+                        </m:r>
+                      </m:sup>
+                    </m:sSup>
+                    <m:r>
+                      <a:rPr lang="en-US" altLang="ja-JP" sz="2400" b="0" i="1" smtClean="0">
+                        <a:latin typeface="Cambria Math" panose="02040503050406030204" pitchFamily="18" charset="0"/>
+                      </a:rPr>
+                      <m:t>−</m:t>
+                    </m:r>
+                    <m:r>
+                      <a:rPr lang="en-US" altLang="ja-JP" sz="2400" b="0" i="1" smtClean="0">
+                        <a:latin typeface="Cambria Math" panose="02040503050406030204" pitchFamily="18" charset="0"/>
+                      </a:rPr>
+                      <m:t>0</m:t>
+                    </m:r>
+                  </m:oMath>
+                </a14:m>
+                <a:r>
+                  <a:rPr lang="en-US" altLang="ja-JP" sz="2400" b="0" dirty="0"/>
+                  <a:t> </a:t>
+                </a:r>
+              </a:p>
+              <a:p>
+                <a14:m>
+                  <m:oMath xmlns:m="http://schemas.openxmlformats.org/officeDocument/2006/math">
+                    <m:r>
+                      <a:rPr lang="en-US" altLang="ja-JP" sz="2400" b="0" i="1" smtClean="0">
+                        <a:latin typeface="Cambria Math" panose="02040503050406030204" pitchFamily="18" charset="0"/>
+                      </a:rPr>
+                      <m:t>300</m:t>
+                    </m:r>
+                    <m:r>
+                      <a:rPr lang="en-US" altLang="ja-JP" sz="2400" b="0" i="1" smtClean="0">
+                        <a:latin typeface="Cambria Math" panose="02040503050406030204" pitchFamily="18" charset="0"/>
+                      </a:rPr>
+                      <m:t>𝐽</m:t>
+                    </m:r>
+                    <m:r>
+                      <a:rPr lang="en-US" altLang="ja-JP" sz="2400" b="0" i="1" smtClean="0">
+                        <a:latin typeface="Cambria Math" panose="02040503050406030204" pitchFamily="18" charset="0"/>
+                      </a:rPr>
+                      <m:t>=</m:t>
+                    </m:r>
+                    <m:sSup>
+                      <m:sSupPr>
+                        <m:ctrlPr>
+                          <a:rPr lang="en-US" altLang="ja-JP" sz="2400" i="1" dirty="0" smtClean="0">
+                            <a:latin typeface="Cambria Math" panose="02040503050406030204" pitchFamily="18" charset="0"/>
+                          </a:rPr>
+                        </m:ctrlPr>
+                      </m:sSupPr>
+                      <m:e>
+                        <m:sSub>
+                          <m:sSubPr>
+                            <m:ctrlPr>
+                              <a:rPr lang="en-US" altLang="ja-JP" sz="2400" i="1" dirty="0" smtClean="0">
+                                <a:latin typeface="Cambria Math" panose="02040503050406030204" pitchFamily="18" charset="0"/>
+                              </a:rPr>
+                            </m:ctrlPr>
+                          </m:sSubPr>
+                          <m:e>
+                            <m:r>
+                              <a:rPr lang="en-US" altLang="ja-JP" sz="2400" b="0" i="1" dirty="0" smtClean="0">
+                                <a:latin typeface="Cambria Math" panose="02040503050406030204" pitchFamily="18" charset="0"/>
+                              </a:rPr>
+                              <m:t>0.0725</m:t>
+                            </m:r>
+                            <m:r>
+                              <a:rPr lang="en-US" altLang="ja-JP" sz="2400" b="0" i="1" dirty="0" smtClean="0">
+                                <a:latin typeface="Cambria Math" panose="02040503050406030204" pitchFamily="18" charset="0"/>
+                              </a:rPr>
+                              <m:t>𝑘𝑔</m:t>
+                            </m:r>
+                            <m:r>
+                              <a:rPr lang="en-US" altLang="ja-JP" sz="2400" b="0" i="1" dirty="0" smtClean="0">
+                                <a:latin typeface="Cambria Math" panose="02040503050406030204" pitchFamily="18" charset="0"/>
+                              </a:rPr>
+                              <m:t>(</m:t>
+                            </m:r>
+                            <m:r>
+                              <a:rPr lang="en-US" altLang="ja-JP" sz="2400" b="0" i="1" dirty="0" smtClean="0">
+                                <a:latin typeface="Cambria Math" panose="02040503050406030204" pitchFamily="18" charset="0"/>
+                              </a:rPr>
+                              <m:t>𝑣</m:t>
+                            </m:r>
+                          </m:e>
+                          <m:sub>
+                            <m:r>
+                              <a:rPr lang="en-US" altLang="ja-JP" sz="2400" b="0" i="1" dirty="0" smtClean="0">
+                                <a:latin typeface="Cambria Math" panose="02040503050406030204" pitchFamily="18" charset="0"/>
+                              </a:rPr>
+                              <m:t>𝑓</m:t>
+                            </m:r>
+                          </m:sub>
+                        </m:sSub>
+                        <m:r>
+                          <a:rPr lang="en-US" altLang="ja-JP" sz="2400" b="0" i="1" dirty="0" smtClean="0">
+                            <a:latin typeface="Cambria Math" panose="02040503050406030204" pitchFamily="18" charset="0"/>
+                          </a:rPr>
+                          <m:t>)</m:t>
+                        </m:r>
+                      </m:e>
+                      <m:sup>
+                        <m:r>
+                          <a:rPr lang="en-US" altLang="ja-JP" sz="2400" b="0" i="1" dirty="0" smtClean="0">
+                            <a:latin typeface="Cambria Math" panose="02040503050406030204" pitchFamily="18" charset="0"/>
+                          </a:rPr>
+                          <m:t>2</m:t>
+                        </m:r>
+                      </m:sup>
+                    </m:sSup>
+                  </m:oMath>
+                </a14:m>
+                <a:r>
+                  <a:rPr lang="en-US" altLang="ja-JP" sz="2400" b="0" dirty="0"/>
+                  <a:t> </a:t>
+                </a:r>
+              </a:p>
+              <a:p>
+                <a14:m>
+                  <m:oMath xmlns:m="http://schemas.openxmlformats.org/officeDocument/2006/math">
+                    <m:r>
+                      <a:rPr lang="en-US" altLang="ja-JP" sz="2400" i="1">
+                        <a:latin typeface="Cambria Math" panose="02040503050406030204" pitchFamily="18" charset="0"/>
+                      </a:rPr>
+                      <m:t>4</m:t>
+                    </m:r>
+                    <m:r>
+                      <a:rPr lang="en-US" altLang="ja-JP" sz="2400" b="0" i="1" smtClean="0">
+                        <a:latin typeface="Cambria Math" panose="02040503050406030204" pitchFamily="18" charset="0"/>
+                      </a:rPr>
+                      <m:t>137.93</m:t>
+                    </m:r>
+                    <m:sSup>
+                      <m:sSupPr>
+                        <m:ctrlPr>
+                          <a:rPr lang="en-US" altLang="ja-JP" sz="2400" b="0" i="1" smtClean="0">
+                            <a:latin typeface="Cambria Math" panose="02040503050406030204" pitchFamily="18" charset="0"/>
+                          </a:rPr>
+                        </m:ctrlPr>
+                      </m:sSupPr>
+                      <m:e>
+                        <m:r>
+                          <a:rPr lang="en-US" altLang="ja-JP" sz="2400" b="0" i="1" smtClean="0">
+                            <a:latin typeface="Cambria Math" panose="02040503050406030204" pitchFamily="18" charset="0"/>
+                          </a:rPr>
+                          <m:t>𝑚</m:t>
+                        </m:r>
+                      </m:e>
+                      <m:sup>
+                        <m:r>
+                          <a:rPr lang="en-US" altLang="ja-JP" sz="2400" b="0" i="1" smtClean="0">
+                            <a:latin typeface="Cambria Math" panose="02040503050406030204" pitchFamily="18" charset="0"/>
+                          </a:rPr>
+                          <m:t>2</m:t>
+                        </m:r>
+                      </m:sup>
+                    </m:sSup>
+                    <m:r>
+                      <a:rPr lang="en-US" altLang="ja-JP" sz="2400" b="0" i="1" smtClean="0">
+                        <a:latin typeface="Cambria Math" panose="02040503050406030204" pitchFamily="18" charset="0"/>
+                      </a:rPr>
+                      <m:t>/</m:t>
+                    </m:r>
+                    <m:sSup>
+                      <m:sSupPr>
+                        <m:ctrlPr>
+                          <a:rPr lang="en-US" altLang="ja-JP" sz="2400" b="0" i="1" smtClean="0">
+                            <a:latin typeface="Cambria Math" panose="02040503050406030204" pitchFamily="18" charset="0"/>
+                          </a:rPr>
+                        </m:ctrlPr>
+                      </m:sSupPr>
+                      <m:e>
+                        <m:r>
+                          <a:rPr lang="ja-JP" altLang="en-US" sz="2400" i="1">
+                            <a:latin typeface="Cambria Math" panose="02040503050406030204" pitchFamily="18" charset="0"/>
+                          </a:rPr>
+                          <m:t>秒</m:t>
+                        </m:r>
+                      </m:e>
+                      <m:sup>
+                        <m:r>
+                          <a:rPr lang="en-US" altLang="ja-JP" sz="2400" b="0" i="1" smtClean="0">
+                            <a:latin typeface="Cambria Math" panose="02040503050406030204" pitchFamily="18" charset="0"/>
+                          </a:rPr>
+                          <m:t>2</m:t>
+                        </m:r>
+                      </m:sup>
+                    </m:sSup>
+                    <m:r>
+                      <a:rPr lang="en-US" altLang="ja-JP" sz="2400" b="0" i="1" smtClean="0">
+                        <a:latin typeface="Cambria Math" panose="02040503050406030204" pitchFamily="18" charset="0"/>
+                      </a:rPr>
+                      <m:t>=</m:t>
+                    </m:r>
+                    <m:sSup>
+                      <m:sSupPr>
+                        <m:ctrlPr>
+                          <a:rPr lang="en-US" altLang="ja-JP" sz="2400" i="1" dirty="0" smtClean="0">
+                            <a:latin typeface="Cambria Math" panose="02040503050406030204" pitchFamily="18" charset="0"/>
+                          </a:rPr>
+                        </m:ctrlPr>
+                      </m:sSupPr>
+                      <m:e>
+                        <m:sSub>
+                          <m:sSubPr>
+                            <m:ctrlPr>
+                              <a:rPr lang="en-US" altLang="ja-JP" sz="2400" i="1" dirty="0" smtClean="0">
+                                <a:latin typeface="Cambria Math" panose="02040503050406030204" pitchFamily="18" charset="0"/>
+                              </a:rPr>
+                            </m:ctrlPr>
+                          </m:sSubPr>
+                          <m:e>
+                            <m:r>
+                              <a:rPr lang="en-US" altLang="ja-JP" sz="2400" b="0" i="1" dirty="0" smtClean="0">
+                                <a:latin typeface="Cambria Math" panose="02040503050406030204" pitchFamily="18" charset="0"/>
+                              </a:rPr>
+                              <m:t> </m:t>
+                            </m:r>
+                            <m:r>
+                              <a:rPr lang="en-US" altLang="ja-JP" sz="2400" b="0" i="1" dirty="0" smtClean="0">
+                                <a:latin typeface="Cambria Math" panose="02040503050406030204" pitchFamily="18" charset="0"/>
+                              </a:rPr>
+                              <m:t>𝑣</m:t>
+                            </m:r>
+                          </m:e>
+                          <m:sub>
+                            <m:r>
+                              <a:rPr lang="en-US" altLang="ja-JP" sz="2400" b="0" i="1" dirty="0" smtClean="0">
+                                <a:latin typeface="Cambria Math" panose="02040503050406030204" pitchFamily="18" charset="0"/>
+                              </a:rPr>
+                              <m:t>𝑓</m:t>
+                            </m:r>
+                          </m:sub>
+                        </m:sSub>
+                      </m:e>
+                      <m:sup>
+                        <m:r>
+                          <a:rPr lang="en-US" altLang="ja-JP" sz="2400" b="0" i="1" dirty="0" smtClean="0">
+                            <a:latin typeface="Cambria Math" panose="02040503050406030204" pitchFamily="18" charset="0"/>
+                          </a:rPr>
+                          <m:t>2</m:t>
+                        </m:r>
+                      </m:sup>
+                    </m:sSup>
+                  </m:oMath>
+                </a14:m>
+                <a:r>
+                  <a:rPr lang="en-US" altLang="ja-JP" sz="2400" b="0" dirty="0"/>
+                  <a:t> </a:t>
+                </a:r>
+              </a:p>
+              <a:p>
+                <a14:m>
+                  <m:oMath xmlns:m="http://schemas.openxmlformats.org/officeDocument/2006/math">
+                    <m:r>
+                      <a:rPr lang="en-US" altLang="ja-JP" sz="2400" i="1" dirty="0">
+                        <a:latin typeface="Cambria Math" panose="02040503050406030204" pitchFamily="18" charset="0"/>
+                      </a:rPr>
+                      <m:t>𝑣𝑓</m:t>
+                    </m:r>
+                    <m:r>
+                      <a:rPr lang="en-US" altLang="ja-JP" sz="2400" b="0" i="1" smtClean="0">
+                        <a:latin typeface="Cambria Math" panose="02040503050406030204" pitchFamily="18" charset="0"/>
+                      </a:rPr>
+                      <m:t>=</m:t>
+                    </m:r>
+                    <m:rad>
+                      <m:radPr>
+                        <m:degHide m:val="on"/>
+                        <m:ctrlPr>
+                          <a:rPr lang="en-US" altLang="ja-JP" sz="2400" i="1">
+                            <a:latin typeface="Cambria Math" panose="02040503050406030204" pitchFamily="18" charset="0"/>
+                          </a:rPr>
+                        </m:ctrlPr>
+                      </m:radPr>
+                      <m:deg/>
+                      <m:e>
+                        <m:r>
+                          <a:rPr lang="en-US" altLang="ja-JP" sz="2400" i="1">
+                            <a:latin typeface="Cambria Math" panose="02040503050406030204" pitchFamily="18" charset="0"/>
+                          </a:rPr>
+                          <m:t>4137.93</m:t>
+                        </m:r>
+                      </m:e>
+                    </m:rad>
+                    <m:r>
+                      <a:rPr lang="en-US" altLang="ja-JP" sz="2400" i="1">
+                        <a:latin typeface="Cambria Math" panose="02040503050406030204" pitchFamily="18" charset="0"/>
+                      </a:rPr>
+                      <m:t>𝑚</m:t>
+                    </m:r>
+                    <m:r>
+                      <a:rPr lang="en-US" altLang="ja-JP" sz="2400" b="0" i="1" smtClean="0">
+                        <a:latin typeface="Cambria Math" panose="02040503050406030204" pitchFamily="18" charset="0"/>
+                      </a:rPr>
+                      <m:t>/</m:t>
+                    </m:r>
+                    <m:r>
+                      <a:rPr lang="ja-JP" altLang="en-US" sz="2400" i="1">
+                        <a:latin typeface="Cambria Math" panose="02040503050406030204" pitchFamily="18" charset="0"/>
+                      </a:rPr>
+                      <m:t>秒</m:t>
+                    </m:r>
+                    <m:r>
+                      <a:rPr lang="en-US" altLang="ja-JP" sz="2400" b="0" i="1" smtClean="0">
+                        <a:latin typeface="Cambria Math" panose="02040503050406030204" pitchFamily="18" charset="0"/>
+                      </a:rPr>
+                      <m:t>=</m:t>
+                    </m:r>
+                    <m:r>
+                      <a:rPr lang="en-US" altLang="ja-JP" sz="2400" b="0" i="1" smtClean="0">
+                        <a:solidFill>
+                          <a:srgbClr val="FF0000"/>
+                        </a:solidFill>
+                        <a:latin typeface="Cambria Math" panose="02040503050406030204" pitchFamily="18" charset="0"/>
+                      </a:rPr>
+                      <m:t>64.33</m:t>
+                    </m:r>
+                    <m:r>
+                      <a:rPr lang="en-US" altLang="ja-JP" sz="2400" i="1">
+                        <a:solidFill>
+                          <a:srgbClr val="FF0000"/>
+                        </a:solidFill>
+                        <a:latin typeface="Cambria Math" panose="02040503050406030204" pitchFamily="18" charset="0"/>
+                      </a:rPr>
+                      <m:t>𝑚</m:t>
+                    </m:r>
+                    <m:r>
+                      <a:rPr lang="en-US" altLang="ja-JP" sz="2400" i="1">
+                        <a:solidFill>
+                          <a:srgbClr val="FF0000"/>
+                        </a:solidFill>
+                        <a:latin typeface="Cambria Math" panose="02040503050406030204" pitchFamily="18" charset="0"/>
+                      </a:rPr>
+                      <m:t>/</m:t>
+                    </m:r>
+                    <m:r>
+                      <a:rPr lang="ja-JP" altLang="en-US" sz="2400" i="1">
+                        <a:solidFill>
+                          <a:srgbClr val="FF0000"/>
+                        </a:solidFill>
+                        <a:latin typeface="Cambria Math" panose="02040503050406030204" pitchFamily="18" charset="0"/>
+                      </a:rPr>
+                      <m:t>秒</m:t>
+                    </m:r>
+                  </m:oMath>
+                </a14:m>
+                <a:r>
+                  <a:rPr lang="en-US" altLang="ja-JP" sz="2400" b="0" dirty="0">
+                    <a:solidFill>
+                      <a:srgbClr val="FF0000"/>
+                    </a:solidFill>
+                  </a:rPr>
+                  <a:t> </a:t>
+                </a:r>
+                <a:endParaRPr lang="en-US" altLang="ja-JP" sz="2400" b="0" dirty="0"/>
+              </a:p>
+            </p:txBody>
+          </p:sp>
+        </mc:Choice>
+        <mc:Fallback>
+          <p:sp>
+            <p:nvSpPr>
+              <p:cNvPr id="6" name="テキスト ボックス 5">
+                <a:extLst>
+                  <a:ext uri="{FF2B5EF4-FFF2-40B4-BE49-F238E27FC236}">
+                    <a16:creationId xmlns:a16="http://schemas.microsoft.com/office/drawing/2014/main" id="{55830AD6-028B-4C4E-80BF-B70DFC1C3A46}"/>
+                  </a:ext>
+                </a:extLst>
+              </p:cNvPr>
+              <p:cNvSpPr txBox="1">
+                <a:spLocks noRot="1" noChangeAspect="1" noMove="1" noResize="1" noEditPoints="1" noAdjustHandles="1" noChangeArrowheads="1" noChangeShapeType="1" noTextEdit="1"/>
+              </p:cNvSpPr>
+              <p:nvPr/>
+            </p:nvSpPr>
+            <p:spPr>
+              <a:xfrm>
+                <a:off x="567542" y="1216429"/>
+                <a:ext cx="10649069" cy="5377498"/>
+              </a:xfrm>
+              <a:prstGeom prst="rect">
+                <a:avLst/>
+              </a:prstGeom>
+              <a:blipFill>
+                <a:blip r:embed="rId2"/>
+                <a:stretch>
+                  <a:fillRect l="-859" t="-907"/>
+                </a:stretch>
+              </a:blipFill>
+            </p:spPr>
+            <p:txBody>
+              <a:bodyPr/>
+              <a:lstStyle/>
+              <a:p>
+                <a:r>
+                  <a:rPr lang="ja-JP" altLang="en-US">
+                    <a:noFill/>
+                  </a:rPr>
+                  <a:t> </a:t>
+                </a:r>
+              </a:p>
+            </p:txBody>
+          </p:sp>
+        </mc:Fallback>
+      </mc:AlternateContent>
+    </p:spTree>
+    <p:extLst>
+      <p:ext uri="{BB962C8B-B14F-4D97-AF65-F5344CB8AC3E}">
+        <p14:creationId xmlns:p14="http://schemas.microsoft.com/office/powerpoint/2010/main" val="910182991"/>
+      </p:ext>
+    </p:extLst>
+  </p:cSld>
+  <p:clrMapOvr>
+    <a:masterClrMapping/>
+  </p:clrMapOvr>
+</p:sld>
+</file>
+
+<file path=ppt/slides/slide6.xml><?xml version="1.0" encoding="utf-8"?>
+<p:sld xmlns:a="http://schemas.openxmlformats.org/drawingml/2006/main" xmlns:r="http://schemas.openxmlformats.org/officeDocument/2006/relationships" xmlns:p="http://schemas.openxmlformats.org/presentationml/2006/main">
+  <p:cSld>
+    <p:spTree>
+      <p:nvGrpSpPr>
+        <p:cNvPr id="1" name=""/>
+        <p:cNvGrpSpPr/>
+        <p:nvPr/>
+      </p:nvGrpSpPr>
+      <p:grpSpPr>
+        <a:xfrm>
+          <a:off x="0" y="0"/>
+          <a:ext cx="0" cy="0"/>
+          <a:chOff x="0" y="0"/>
+          <a:chExt cx="0" cy="0"/>
+        </a:xfrm>
+      </p:grpSpPr>
+      <p:sp>
+        <p:nvSpPr>
+          <p:cNvPr id="4" name="テキスト ボックス 3">
+            <a:extLst>
+              <a:ext uri="{FF2B5EF4-FFF2-40B4-BE49-F238E27FC236}">
+                <a16:creationId xmlns:a16="http://schemas.microsoft.com/office/drawing/2014/main" id="{5A13BF46-B8C5-48AA-8308-C9ECFF431A18}"/>
+              </a:ext>
+            </a:extLst>
+          </p:cNvPr>
+          <p:cNvSpPr txBox="1"/>
+          <p:nvPr/>
+        </p:nvSpPr>
+        <p:spPr>
+          <a:xfrm>
+            <a:off x="567542" y="491954"/>
+            <a:ext cx="3995004" cy="584775"/>
+          </a:xfrm>
+          <a:prstGeom prst="rect">
+            <a:avLst/>
+          </a:prstGeom>
+          <a:noFill/>
+        </p:spPr>
+        <p:txBody>
+          <a:bodyPr wrap="none" rtlCol="0">
+            <a:spAutoFit/>
+          </a:bodyPr>
+          <a:lstStyle/>
+          <a:p>
+            <a:r>
+              <a:rPr kumimoji="1" lang="ja-JP" altLang="en-US" sz="3200" b="1" u="sng" dirty="0"/>
+              <a:t>運動エネルギー 例題</a:t>
+            </a:r>
+            <a:endParaRPr kumimoji="1" lang="en-US" altLang="ja-JP" sz="3200" b="1" u="sng" dirty="0"/>
+          </a:p>
+        </p:txBody>
+      </p:sp>
+      <mc:AlternateContent xmlns:mc="http://schemas.openxmlformats.org/markup-compatibility/2006">
+        <mc:Choice xmlns:a14="http://schemas.microsoft.com/office/drawing/2010/main" Requires="a14">
+          <p:sp>
+            <p:nvSpPr>
+              <p:cNvPr id="6" name="テキスト ボックス 5">
+                <a:extLst>
+                  <a:ext uri="{FF2B5EF4-FFF2-40B4-BE49-F238E27FC236}">
+                    <a16:creationId xmlns:a16="http://schemas.microsoft.com/office/drawing/2014/main" id="{55830AD6-028B-4C4E-80BF-B70DFC1C3A46}"/>
+                  </a:ext>
+                </a:extLst>
+              </p:cNvPr>
+              <p:cNvSpPr txBox="1"/>
+              <p:nvPr/>
+            </p:nvSpPr>
+            <p:spPr>
+              <a:xfrm>
+                <a:off x="567542" y="1216429"/>
+                <a:ext cx="10549683" cy="2677656"/>
+              </a:xfrm>
+              <a:prstGeom prst="rect">
+                <a:avLst/>
+              </a:prstGeom>
+              <a:noFill/>
+            </p:spPr>
+            <p:txBody>
+              <a:bodyPr wrap="none" rtlCol="0">
+                <a:spAutoFit/>
+              </a:bodyPr>
+              <a:lstStyle/>
+              <a:p>
+                <a:r>
+                  <a:rPr lang="ja-JP" altLang="en-US" sz="2400" b="0" dirty="0"/>
+                  <a:t>①勇者は質量 </a:t>
+                </a:r>
+                <a14:m>
+                  <m:oMath xmlns:m="http://schemas.openxmlformats.org/officeDocument/2006/math">
+                    <m:r>
+                      <a:rPr lang="en-US" altLang="ja-JP" sz="2400" b="0" i="1" dirty="0" smtClean="0">
+                        <a:latin typeface="Cambria Math" panose="02040503050406030204" pitchFamily="18" charset="0"/>
+                      </a:rPr>
+                      <m:t>2.0 </m:t>
+                    </m:r>
+                    <m:r>
+                      <a:rPr lang="en-US" altLang="ja-JP" sz="2400" b="0" i="1" dirty="0" smtClean="0">
+                        <a:latin typeface="Cambria Math" panose="02040503050406030204" pitchFamily="18" charset="0"/>
+                      </a:rPr>
+                      <m:t>𝑘𝑔</m:t>
+                    </m:r>
+                    <m:r>
+                      <a:rPr lang="en-US" altLang="ja-JP" sz="2400" b="0" i="1" dirty="0" smtClean="0">
+                        <a:latin typeface="Cambria Math" panose="02040503050406030204" pitchFamily="18" charset="0"/>
+                      </a:rPr>
+                      <m:t> </m:t>
+                    </m:r>
+                  </m:oMath>
+                </a14:m>
+                <a:r>
+                  <a:rPr lang="ja-JP" altLang="en-US" sz="2400" b="0" dirty="0"/>
+                  <a:t>の木箱を押して道を開こうとしている。</a:t>
+                </a:r>
+                <a:endParaRPr lang="en-US" altLang="ja-JP" sz="2400" b="0" dirty="0"/>
+              </a:p>
+              <a:p>
+                <a:r>
+                  <a:rPr lang="en-US" altLang="ja-JP" sz="2400" dirty="0"/>
+                  <a:t>   </a:t>
+                </a:r>
+                <a:r>
+                  <a:rPr lang="ja-JP" altLang="en-US" sz="2400" b="0" dirty="0"/>
+                  <a:t>力を </a:t>
+                </a:r>
+                <a14:m>
+                  <m:oMath xmlns:m="http://schemas.openxmlformats.org/officeDocument/2006/math">
+                    <m:r>
+                      <a:rPr lang="en-US" altLang="ja-JP" sz="2400" b="0" i="1" dirty="0" smtClean="0">
+                        <a:latin typeface="Cambria Math" panose="02040503050406030204" pitchFamily="18" charset="0"/>
+                      </a:rPr>
+                      <m:t>10 </m:t>
+                    </m:r>
+                    <m:r>
+                      <a:rPr lang="en-US" altLang="ja-JP" sz="2400" b="0" i="1" dirty="0" smtClean="0">
+                        <a:latin typeface="Cambria Math" panose="02040503050406030204" pitchFamily="18" charset="0"/>
+                      </a:rPr>
+                      <m:t>𝑁</m:t>
+                    </m:r>
+                  </m:oMath>
+                </a14:m>
+                <a:r>
+                  <a:rPr lang="en-US" altLang="ja-JP" sz="2400" b="0" dirty="0"/>
+                  <a:t> </a:t>
+                </a:r>
+                <a:r>
+                  <a:rPr lang="ja-JP" altLang="en-US" sz="2400" b="0" dirty="0"/>
+                  <a:t>で押し続け、箱は </a:t>
+                </a:r>
+                <a14:m>
+                  <m:oMath xmlns:m="http://schemas.openxmlformats.org/officeDocument/2006/math">
+                    <m:r>
+                      <a:rPr lang="en-US" altLang="ja-JP" sz="2400" b="0" i="1" dirty="0" smtClean="0">
+                        <a:latin typeface="Cambria Math" panose="02040503050406030204" pitchFamily="18" charset="0"/>
+                      </a:rPr>
+                      <m:t>4.0 </m:t>
+                    </m:r>
+                    <m:r>
+                      <a:rPr lang="en-US" altLang="ja-JP" sz="2400" b="0" i="1" dirty="0" smtClean="0">
+                        <a:latin typeface="Cambria Math" panose="02040503050406030204" pitchFamily="18" charset="0"/>
+                      </a:rPr>
+                      <m:t>𝑚</m:t>
+                    </m:r>
+                  </m:oMath>
+                </a14:m>
+                <a:r>
+                  <a:rPr lang="en-US" altLang="ja-JP" sz="2400" b="0" dirty="0"/>
+                  <a:t> </a:t>
+                </a:r>
+                <a:r>
+                  <a:rPr lang="ja-JP" altLang="en-US" sz="2400" b="0" dirty="0"/>
+                  <a:t>動いた。最初は静止していたとする。</a:t>
+                </a:r>
+                <a:endParaRPr lang="en-US" altLang="ja-JP" sz="2400" b="0" dirty="0"/>
+              </a:p>
+              <a:p>
+                <a:r>
+                  <a:rPr lang="ja-JP" altLang="en-US" sz="2400" dirty="0"/>
+                  <a:t>　木箱の最終速度を求めよ。</a:t>
+                </a:r>
+                <a:endParaRPr lang="en-US" altLang="ja-JP" sz="2400" dirty="0"/>
+              </a:p>
+              <a:p>
+                <a:endParaRPr lang="en-US" altLang="ja-JP" sz="2400" b="0" dirty="0"/>
+              </a:p>
+              <a:p>
+                <a:r>
+                  <a:rPr lang="ja-JP" altLang="en-US" sz="2400" dirty="0"/>
+                  <a:t>②ゲームキャラ（質量 </a:t>
+                </a:r>
+                <a14:m>
+                  <m:oMath xmlns:m="http://schemas.openxmlformats.org/officeDocument/2006/math">
+                    <m:r>
+                      <a:rPr lang="en-US" altLang="ja-JP" sz="2400" i="1" dirty="0" smtClean="0">
+                        <a:latin typeface="Cambria Math" panose="02040503050406030204" pitchFamily="18" charset="0"/>
+                      </a:rPr>
+                      <m:t>1.0 </m:t>
+                    </m:r>
+                    <m:r>
+                      <a:rPr lang="en-US" altLang="ja-JP" sz="2400" i="1" dirty="0" smtClean="0">
+                        <a:latin typeface="Cambria Math" panose="02040503050406030204" pitchFamily="18" charset="0"/>
+                      </a:rPr>
+                      <m:t>𝑘𝑔</m:t>
+                    </m:r>
+                  </m:oMath>
+                </a14:m>
+                <a:r>
+                  <a:rPr lang="ja-JP" altLang="en-US" sz="2400" dirty="0"/>
+                  <a:t>）が、すでに </a:t>
+                </a:r>
+                <a14:m>
+                  <m:oMath xmlns:m="http://schemas.openxmlformats.org/officeDocument/2006/math">
+                    <m:r>
+                      <a:rPr lang="en-US" altLang="ja-JP" sz="2400" i="1" dirty="0" smtClean="0">
+                        <a:latin typeface="Cambria Math" panose="02040503050406030204" pitchFamily="18" charset="0"/>
+                      </a:rPr>
+                      <m:t>6.0 </m:t>
+                    </m:r>
+                    <m:r>
+                      <a:rPr lang="en-US" altLang="ja-JP" sz="2400" i="1" dirty="0" smtClean="0">
+                        <a:latin typeface="Cambria Math" panose="02040503050406030204" pitchFamily="18" charset="0"/>
+                      </a:rPr>
+                      <m:t>𝑚</m:t>
+                    </m:r>
+                    <m:r>
+                      <a:rPr lang="en-US" altLang="ja-JP" sz="2400" i="1" dirty="0" smtClean="0">
+                        <a:latin typeface="Cambria Math" panose="02040503050406030204" pitchFamily="18" charset="0"/>
+                      </a:rPr>
+                      <m:t>/</m:t>
+                    </m:r>
+                    <m:r>
+                      <a:rPr lang="en-US" altLang="ja-JP" sz="2400" i="1" dirty="0" smtClean="0">
+                        <a:latin typeface="Cambria Math" panose="02040503050406030204" pitchFamily="18" charset="0"/>
+                      </a:rPr>
+                      <m:t>𝑠</m:t>
+                    </m:r>
+                    <m:r>
+                      <a:rPr lang="en-US" altLang="ja-JP" sz="2400" i="1" dirty="0" smtClean="0">
+                        <a:latin typeface="Cambria Math" panose="02040503050406030204" pitchFamily="18" charset="0"/>
+                      </a:rPr>
+                      <m:t> </m:t>
+                    </m:r>
+                  </m:oMath>
+                </a14:m>
+                <a:r>
+                  <a:rPr lang="ja-JP" altLang="en-US" sz="2400" dirty="0"/>
+                  <a:t>で走っているときに、</a:t>
+                </a:r>
+                <a:endParaRPr lang="en-US" altLang="ja-JP" sz="2400" dirty="0"/>
+              </a:p>
+              <a:p>
+                <a:r>
+                  <a:rPr lang="ja-JP" altLang="en-US" sz="2400" dirty="0"/>
+                  <a:t>　パワーアップして </a:t>
+                </a:r>
+                <a14:m>
+                  <m:oMath xmlns:m="http://schemas.openxmlformats.org/officeDocument/2006/math">
+                    <m:r>
+                      <a:rPr lang="en-US" altLang="ja-JP" sz="2400" i="1" dirty="0" smtClean="0">
+                        <a:latin typeface="Cambria Math" panose="02040503050406030204" pitchFamily="18" charset="0"/>
+                      </a:rPr>
+                      <m:t>20 </m:t>
+                    </m:r>
+                    <m:r>
+                      <a:rPr lang="en-US" altLang="ja-JP" sz="2400" i="1" dirty="0" smtClean="0">
+                        <a:latin typeface="Cambria Math" panose="02040503050406030204" pitchFamily="18" charset="0"/>
+                      </a:rPr>
+                      <m:t>𝑁</m:t>
+                    </m:r>
+                  </m:oMath>
+                </a14:m>
+                <a:r>
+                  <a:rPr lang="en-US" altLang="ja-JP" sz="2400" dirty="0"/>
+                  <a:t> </a:t>
+                </a:r>
+                <a:r>
+                  <a:rPr lang="ja-JP" altLang="en-US" sz="2400" dirty="0"/>
+                  <a:t>の推進力を </a:t>
+                </a:r>
+                <a14:m>
+                  <m:oMath xmlns:m="http://schemas.openxmlformats.org/officeDocument/2006/math">
+                    <m:r>
+                      <a:rPr lang="en-US" altLang="ja-JP" sz="2400" i="1" dirty="0" smtClean="0">
+                        <a:latin typeface="Cambria Math" panose="02040503050406030204" pitchFamily="18" charset="0"/>
+                      </a:rPr>
+                      <m:t>2.0 </m:t>
+                    </m:r>
+                    <m:r>
+                      <a:rPr lang="en-US" altLang="ja-JP" sz="2400" i="1" dirty="0" smtClean="0">
+                        <a:latin typeface="Cambria Math" panose="02040503050406030204" pitchFamily="18" charset="0"/>
+                      </a:rPr>
+                      <m:t>𝑚</m:t>
+                    </m:r>
+                  </m:oMath>
+                </a14:m>
+                <a:r>
+                  <a:rPr lang="en-US" altLang="ja-JP" sz="2400" dirty="0"/>
+                  <a:t> </a:t>
+                </a:r>
+                <a:r>
+                  <a:rPr lang="ja-JP" altLang="en-US" sz="2400" dirty="0"/>
+                  <a:t>の間かけ続けた。</a:t>
+                </a:r>
+                <a:endParaRPr lang="en-US" altLang="ja-JP" sz="2400" dirty="0"/>
+              </a:p>
+              <a:p>
+                <a:r>
+                  <a:rPr lang="ja-JP" altLang="en-US" sz="2400" dirty="0"/>
+                  <a:t>　キャラのスピードはいくつになるか？</a:t>
+                </a:r>
+                <a:endParaRPr lang="en-US" altLang="ja-JP" sz="2400" b="0" dirty="0"/>
+              </a:p>
+            </p:txBody>
+          </p:sp>
+        </mc:Choice>
+        <mc:Fallback>
+          <p:sp>
+            <p:nvSpPr>
+              <p:cNvPr id="6" name="テキスト ボックス 5">
+                <a:extLst>
+                  <a:ext uri="{FF2B5EF4-FFF2-40B4-BE49-F238E27FC236}">
+                    <a16:creationId xmlns:a16="http://schemas.microsoft.com/office/drawing/2014/main" id="{55830AD6-028B-4C4E-80BF-B70DFC1C3A46}"/>
+                  </a:ext>
+                </a:extLst>
+              </p:cNvPr>
+              <p:cNvSpPr txBox="1">
+                <a:spLocks noRot="1" noChangeAspect="1" noMove="1" noResize="1" noEditPoints="1" noAdjustHandles="1" noChangeArrowheads="1" noChangeShapeType="1" noTextEdit="1"/>
+              </p:cNvSpPr>
+              <p:nvPr/>
+            </p:nvSpPr>
+            <p:spPr>
+              <a:xfrm>
+                <a:off x="567542" y="1216429"/>
+                <a:ext cx="10549683" cy="2677656"/>
+              </a:xfrm>
+              <a:prstGeom prst="rect">
+                <a:avLst/>
+              </a:prstGeom>
+              <a:blipFill>
+                <a:blip r:embed="rId2"/>
+                <a:stretch>
+                  <a:fillRect l="-867" t="-1822" b="-4328"/>
+                </a:stretch>
+              </a:blipFill>
+            </p:spPr>
+            <p:txBody>
+              <a:bodyPr/>
+              <a:lstStyle/>
+              <a:p>
+                <a:r>
+                  <a:rPr lang="ja-JP" altLang="en-US">
+                    <a:noFill/>
+                  </a:rPr>
+                  <a:t> </a:t>
+                </a:r>
+              </a:p>
+            </p:txBody>
+          </p:sp>
+        </mc:Fallback>
+      </mc:AlternateContent>
+    </p:spTree>
+    <p:extLst>
+      <p:ext uri="{BB962C8B-B14F-4D97-AF65-F5344CB8AC3E}">
+        <p14:creationId xmlns:p14="http://schemas.microsoft.com/office/powerpoint/2010/main" val="188722398"/>
       </p:ext>
     </p:extLst>
   </p:cSld>
